--- a/slides/07-regularization.pptx
+++ b/slides/07-regularization.pptx
@@ -5,7 +5,7 @@
     <p:sldMasterId id="2147483686" r:id="rId1"/>
   </p:sldMasterIdLst>
   <p:notesMasterIdLst>
-    <p:notesMasterId r:id="rId19"/>
+    <p:notesMasterId r:id="rId20"/>
   </p:notesMasterIdLst>
   <p:sldIdLst>
     <p:sldId id="256" r:id="rId2"/>
@@ -16,15 +16,16 @@
     <p:sldId id="277" r:id="rId7"/>
     <p:sldId id="278" r:id="rId8"/>
     <p:sldId id="280" r:id="rId9"/>
-    <p:sldId id="281" r:id="rId10"/>
-    <p:sldId id="306" r:id="rId11"/>
-    <p:sldId id="285" r:id="rId12"/>
-    <p:sldId id="288" r:id="rId13"/>
-    <p:sldId id="287" r:id="rId14"/>
-    <p:sldId id="310" r:id="rId15"/>
-    <p:sldId id="309" r:id="rId16"/>
-    <p:sldId id="311" r:id="rId17"/>
-    <p:sldId id="308" r:id="rId18"/>
+    <p:sldId id="312" r:id="rId10"/>
+    <p:sldId id="281" r:id="rId11"/>
+    <p:sldId id="306" r:id="rId12"/>
+    <p:sldId id="285" r:id="rId13"/>
+    <p:sldId id="288" r:id="rId14"/>
+    <p:sldId id="287" r:id="rId15"/>
+    <p:sldId id="310" r:id="rId16"/>
+    <p:sldId id="309" r:id="rId17"/>
+    <p:sldId id="311" r:id="rId18"/>
+    <p:sldId id="308" r:id="rId19"/>
   </p:sldIdLst>
   <p:sldSz cx="12192000" cy="6858000"/>
   <p:notesSz cx="6858000" cy="9144000"/>
@@ -216,7 +217,7 @@
           <a:p>
             <a:fld id="{A5320152-7289-42ED-97D3-BBB411F9F8C0}" type="datetimeFigureOut">
               <a:rPr lang="en-US" smtClean="0"/>
-              <a:t>8/31/2026</a:t>
+              <a:t>9/24/2026</a:t>
             </a:fld>
             <a:endParaRPr lang="en-US"/>
           </a:p>
@@ -685,6 +686,90 @@
 </p:notes>
 </file>
 
+<file path=ppt/notesSlides/notesSlide2.xml><?xml version="1.0" encoding="utf-8"?>
+<p:notes xmlns:a="http://schemas.openxmlformats.org/drawingml/2006/main" xmlns:r="http://schemas.openxmlformats.org/officeDocument/2006/relationships" xmlns:p="http://schemas.openxmlformats.org/presentationml/2006/main">
+  <p:cSld>
+    <p:spTree>
+      <p:nvGrpSpPr>
+        <p:cNvPr id="1" name=""/>
+        <p:cNvGrpSpPr/>
+        <p:nvPr/>
+      </p:nvGrpSpPr>
+      <p:grpSpPr>
+        <a:xfrm>
+          <a:off x="0" y="0"/>
+          <a:ext cx="0" cy="0"/>
+          <a:chOff x="0" y="0"/>
+          <a:chExt cx="0" cy="0"/>
+        </a:xfrm>
+      </p:grpSpPr>
+      <p:sp>
+        <p:nvSpPr>
+          <p:cNvPr id="2" name="Slide Image Placeholder 1"/>
+          <p:cNvSpPr>
+            <a:spLocks noGrp="1" noRot="1" noChangeAspect="1"/>
+          </p:cNvSpPr>
+          <p:nvPr>
+            <p:ph type="sldImg"/>
+          </p:nvPr>
+        </p:nvSpPr>
+        <p:spPr/>
+      </p:sp>
+      <p:sp>
+        <p:nvSpPr>
+          <p:cNvPr id="3" name="Notes Placeholder 2"/>
+          <p:cNvSpPr>
+            <a:spLocks noGrp="1"/>
+          </p:cNvSpPr>
+          <p:nvPr>
+            <p:ph type="body" idx="1"/>
+          </p:nvPr>
+        </p:nvSpPr>
+        <p:spPr/>
+        <p:txBody>
+          <a:bodyPr/>
+          <a:lstStyle/>
+          <a:p>
+            <a:endParaRPr lang="en-US" dirty="0"/>
+          </a:p>
+        </p:txBody>
+      </p:sp>
+      <p:sp>
+        <p:nvSpPr>
+          <p:cNvPr id="4" name="Slide Number Placeholder 3"/>
+          <p:cNvSpPr>
+            <a:spLocks noGrp="1"/>
+          </p:cNvSpPr>
+          <p:nvPr>
+            <p:ph type="sldNum" sz="quarter" idx="5"/>
+          </p:nvPr>
+        </p:nvSpPr>
+        <p:spPr/>
+        <p:txBody>
+          <a:bodyPr/>
+          <a:lstStyle/>
+          <a:p>
+            <a:fld id="{98F0E3D6-3C77-45F1-B7E2-5B66F3D24A72}" type="slidenum">
+              <a:rPr lang="en-US" smtClean="0"/>
+              <a:t>9</a:t>
+            </a:fld>
+            <a:endParaRPr lang="en-US"/>
+          </a:p>
+        </p:txBody>
+      </p:sp>
+    </p:spTree>
+    <p:extLst>
+      <p:ext uri="{BB962C8B-B14F-4D97-AF65-F5344CB8AC3E}">
+        <p14:creationId xmlns:p14="http://schemas.microsoft.com/office/powerpoint/2010/main" val="3285174179"/>
+      </p:ext>
+    </p:extLst>
+  </p:cSld>
+  <p:clrMapOvr>
+    <a:masterClrMapping/>
+  </p:clrMapOvr>
+</p:notes>
+</file>
+
 <file path=ppt/slideLayouts/slideLayout1.xml><?xml version="1.0" encoding="utf-8"?>
 <p:sldLayout xmlns:a="http://schemas.openxmlformats.org/drawingml/2006/main" xmlns:r="http://schemas.openxmlformats.org/officeDocument/2006/relationships" xmlns:p="http://schemas.openxmlformats.org/presentationml/2006/main" type="title" preserve="1">
   <p:cSld name="Title Slide">
@@ -838,7 +923,7 @@
           <a:p>
             <a:fld id="{D1D1EADE-8E88-4C7C-8AC5-FB148DE4940E}" type="datetime1">
               <a:rPr lang="en-US" smtClean="0"/>
-              <a:t>8/31/2026</a:t>
+              <a:t>9/24/2026</a:t>
             </a:fld>
             <a:endParaRPr lang="en-US"/>
           </a:p>
@@ -1038,7 +1123,7 @@
           <a:p>
             <a:fld id="{EC3C8B9C-477D-492A-96AD-1FC2CC997A73}" type="datetime1">
               <a:rPr lang="en-US" smtClean="0"/>
-              <a:t>8/31/2026</a:t>
+              <a:t>9/24/2026</a:t>
             </a:fld>
             <a:endParaRPr lang="en-US"/>
           </a:p>
@@ -1248,7 +1333,7 @@
           <a:p>
             <a:fld id="{42D3AED5-E26D-4E29-B1B3-7847B6779594}" type="datetime1">
               <a:rPr lang="en-US" smtClean="0"/>
-              <a:t>8/31/2026</a:t>
+              <a:t>9/24/2026</a:t>
             </a:fld>
             <a:endParaRPr lang="en-US"/>
           </a:p>
@@ -1801,7 +1886,7 @@
           <a:p>
             <a:fld id="{157B6794-849E-4626-908B-D15793550EFB}" type="datetime1">
               <a:rPr lang="en-US" smtClean="0"/>
-              <a:t>8/31/2026</a:t>
+              <a:t>9/24/2026</a:t>
             </a:fld>
             <a:endParaRPr lang="en-US"/>
           </a:p>
@@ -2077,7 +2162,7 @@
           <a:p>
             <a:fld id="{63DB64E7-5594-42A3-ADBF-E95A7ACEAD64}" type="datetime1">
               <a:rPr lang="en-US" smtClean="0"/>
-              <a:t>8/31/2026</a:t>
+              <a:t>9/24/2026</a:t>
             </a:fld>
             <a:endParaRPr lang="en-US"/>
           </a:p>
@@ -2350,7 +2435,7 @@
           <a:p>
             <a:fld id="{18462B0B-D248-4FFB-8695-AD7FA4B1284A}" type="datetime1">
               <a:rPr lang="en-US" smtClean="0"/>
-              <a:t>8/31/2026</a:t>
+              <a:t>9/24/2026</a:t>
             </a:fld>
             <a:endParaRPr lang="en-US"/>
           </a:p>
@@ -2773,7 +2858,7 @@
           <a:p>
             <a:fld id="{D0378EFB-9159-4510-B73F-4F0409ADE937}" type="datetime1">
               <a:rPr lang="en-US" smtClean="0"/>
-              <a:t>8/31/2026</a:t>
+              <a:t>9/24/2026</a:t>
             </a:fld>
             <a:endParaRPr lang="en-US"/>
           </a:p>
@@ -2915,7 +3000,7 @@
           <a:p>
             <a:fld id="{89BC9412-2452-4BED-A324-9D8C115361AD}" type="datetime1">
               <a:rPr lang="en-US" smtClean="0"/>
-              <a:t>8/31/2026</a:t>
+              <a:t>9/24/2026</a:t>
             </a:fld>
             <a:endParaRPr lang="en-US"/>
           </a:p>
@@ -3028,7 +3113,7 @@
           <a:p>
             <a:fld id="{F5318F62-D251-40E8-A23C-F4CFE9FEAB41}" type="datetime1">
               <a:rPr lang="en-US" smtClean="0"/>
-              <a:t>8/31/2026</a:t>
+              <a:t>9/24/2026</a:t>
             </a:fld>
             <a:endParaRPr lang="en-US"/>
           </a:p>
@@ -3341,7 +3426,7 @@
           <a:p>
             <a:fld id="{44F76144-149E-4874-93A5-554A0357CF82}" type="datetime1">
               <a:rPr lang="en-US" smtClean="0"/>
-              <a:t>8/31/2026</a:t>
+              <a:t>9/24/2026</a:t>
             </a:fld>
             <a:endParaRPr lang="en-US"/>
           </a:p>
@@ -3634,7 +3719,7 @@
           <a:p>
             <a:fld id="{50BA65D8-0540-4835-AE5C-25D29DBA01BE}" type="datetime1">
               <a:rPr lang="en-US" smtClean="0"/>
-              <a:t>8/31/2026</a:t>
+              <a:t>9/24/2026</a:t>
             </a:fld>
             <a:endParaRPr lang="en-US"/>
           </a:p>
@@ -3876,7 +3961,7 @@
           <a:p>
             <a:fld id="{E31BA835-12AC-4E8F-955A-EA3F4DE2791F}" type="datetime1">
               <a:rPr lang="en-US" smtClean="0"/>
-              <a:t>8/31/2026</a:t>
+              <a:t>9/24/2026</a:t>
             </a:fld>
             <a:endParaRPr lang="en-US"/>
           </a:p>
@@ -4818,6 +4903,1768 @@
   <p:cSld>
     <p:spTree>
       <p:nvGrpSpPr>
+        <p:cNvPr id="1" name=""/>
+        <p:cNvGrpSpPr/>
+        <p:nvPr/>
+      </p:nvGrpSpPr>
+      <p:grpSpPr>
+        <a:xfrm>
+          <a:off x="0" y="0"/>
+          <a:ext cx="0" cy="0"/>
+          <a:chOff x="0" y="0"/>
+          <a:chExt cx="0" cy="0"/>
+        </a:xfrm>
+      </p:grpSpPr>
+      <p:sp>
+        <p:nvSpPr>
+          <p:cNvPr id="280" name="Regularized Cost Functions"/>
+          <p:cNvSpPr txBox="1">
+            <a:spLocks noGrp="1"/>
+          </p:cNvSpPr>
+          <p:nvPr>
+            <p:ph type="title"/>
+          </p:nvPr>
+        </p:nvSpPr>
+        <p:spPr>
+          <a:xfrm>
+            <a:off x="750367" y="826603"/>
+            <a:ext cx="10691265" cy="1307592"/>
+          </a:xfrm>
+          <a:prstGeom prst="rect">
+            <a:avLst/>
+          </a:prstGeom>
+        </p:spPr>
+        <p:txBody>
+          <a:bodyPr/>
+          <a:lstStyle/>
+          <a:p>
+            <a:r>
+              <a:rPr lang="en-US"/>
+              <a:t>ℓ1 vs ℓ2 Penalties</a:t>
+            </a:r>
+            <a:endParaRPr/>
+          </a:p>
+        </p:txBody>
+      </p:sp>
+      <mc:AlternateContent xmlns:mc="http://schemas.openxmlformats.org/markup-compatibility/2006">
+        <mc:Choice xmlns:a14="http://schemas.microsoft.com/office/drawing/2010/main" Requires="a14">
+          <p:sp>
+            <p:nvSpPr>
+              <p:cNvPr id="281" name="Lasso linear regression cost function    (where  )…"/>
+              <p:cNvSpPr txBox="1">
+                <a:spLocks noGrp="1"/>
+              </p:cNvSpPr>
+              <p:nvPr>
+                <p:ph type="body" idx="1"/>
+              </p:nvPr>
+            </p:nvSpPr>
+            <p:spPr>
+              <a:xfrm>
+                <a:off x="2015133" y="2134195"/>
+                <a:ext cx="9762339" cy="4232672"/>
+              </a:xfrm>
+              <a:prstGeom prst="rect">
+                <a:avLst/>
+              </a:prstGeom>
+            </p:spPr>
+            <p:txBody>
+              <a:bodyPr/>
+              <a:lstStyle/>
+              <a:p>
+                <a:r>
+                  <a:rPr b="1" u="sng">
+                    <a:latin typeface="Graphik"/>
+                    <a:ea typeface="Graphik"/>
+                    <a:cs typeface="Graphik"/>
+                    <a:sym typeface="Graphik"/>
+                  </a:rPr>
+                  <a:t>Lasso</a:t>
+                </a:r>
+                <a:r>
+                  <a:t> linear regression cost function </a:t>
+                </a:r>
+                <a:br>
+                  <a:rPr/>
+                </a:br>
+                <a14:m>
+                  <m:oMath xmlns:m="http://schemas.openxmlformats.org/officeDocument/2006/math">
+                    <m:sSub>
+                      <m:sSubPr>
+                        <m:ctrlPr>
+                          <a:rPr sz="2391" i="1">
+                            <a:solidFill>
+                              <a:srgbClr val="52575F"/>
+                            </a:solidFill>
+                            <a:latin typeface="Cambria Math" panose="02040503050406030204" pitchFamily="18" charset="0"/>
+                          </a:rPr>
+                        </m:ctrlPr>
+                      </m:sSubPr>
+                      <m:e>
+                        <m:r>
+                          <a:rPr sz="2391" i="1">
+                            <a:solidFill>
+                              <a:srgbClr val="52575F"/>
+                            </a:solidFill>
+                            <a:latin typeface="Cambria Math" panose="02040503050406030204" pitchFamily="18" charset="0"/>
+                          </a:rPr>
+                          <m:t>𝐽</m:t>
+                        </m:r>
+                      </m:e>
+                      <m:sub>
+                        <m:r>
+                          <a:rPr sz="2391" i="1">
+                            <a:solidFill>
+                              <a:srgbClr val="52575F"/>
+                            </a:solidFill>
+                            <a:latin typeface="Cambria Math" panose="02040503050406030204" pitchFamily="18" charset="0"/>
+                          </a:rPr>
+                          <m:t>𝑙𝑎𝑠𝑠𝑜</m:t>
+                        </m:r>
+                      </m:sub>
+                    </m:sSub>
+                    <m:r>
+                      <a:rPr sz="2391" i="1">
+                        <a:solidFill>
+                          <a:srgbClr val="52575F"/>
+                        </a:solidFill>
+                        <a:latin typeface="Cambria Math" panose="02040503050406030204" pitchFamily="18" charset="0"/>
+                      </a:rPr>
+                      <m:t>(</m:t>
+                    </m:r>
+                    <m:r>
+                      <a:rPr sz="2391" i="1">
+                        <a:solidFill>
+                          <a:srgbClr val="52575F"/>
+                        </a:solidFill>
+                        <a:latin typeface="Cambria Math" panose="02040503050406030204" pitchFamily="18" charset="0"/>
+                      </a:rPr>
+                      <m:t>𝛽</m:t>
+                    </m:r>
+                    <m:r>
+                      <a:rPr sz="2391" i="1">
+                        <a:solidFill>
+                          <a:srgbClr val="52575F"/>
+                        </a:solidFill>
+                        <a:latin typeface="Cambria Math" panose="02040503050406030204" pitchFamily="18" charset="0"/>
+                      </a:rPr>
+                      <m:t>)=</m:t>
+                    </m:r>
+                    <m:f>
+                      <m:fPr>
+                        <m:ctrlPr>
+                          <a:rPr sz="2391" i="1">
+                            <a:solidFill>
+                              <a:srgbClr val="52575F"/>
+                            </a:solidFill>
+                            <a:latin typeface="Cambria Math" panose="02040503050406030204" pitchFamily="18" charset="0"/>
+                          </a:rPr>
+                        </m:ctrlPr>
+                      </m:fPr>
+                      <m:num>
+                        <m:r>
+                          <a:rPr sz="2391" i="1">
+                            <a:solidFill>
+                              <a:srgbClr val="52575F"/>
+                            </a:solidFill>
+                            <a:latin typeface="Cambria Math" panose="02040503050406030204" pitchFamily="18" charset="0"/>
+                          </a:rPr>
+                          <m:t>1</m:t>
+                        </m:r>
+                      </m:num>
+                      <m:den>
+                        <m:r>
+                          <a:rPr sz="2391" i="1">
+                            <a:solidFill>
+                              <a:srgbClr val="52575F"/>
+                            </a:solidFill>
+                            <a:latin typeface="Cambria Math" panose="02040503050406030204" pitchFamily="18" charset="0"/>
+                          </a:rPr>
+                          <m:t>𝑛</m:t>
+                        </m:r>
+                      </m:den>
+                    </m:f>
+                    <m:limUpp>
+                      <m:limUppPr>
+                        <m:ctrlPr>
+                          <a:rPr sz="2391" i="1">
+                            <a:solidFill>
+                              <a:srgbClr val="52575F"/>
+                            </a:solidFill>
+                            <a:latin typeface="Cambria Math" panose="02040503050406030204" pitchFamily="18" charset="0"/>
+                          </a:rPr>
+                        </m:ctrlPr>
+                      </m:limUppPr>
+                      <m:e>
+                        <m:limLow>
+                          <m:limLowPr>
+                            <m:ctrlPr>
+                              <a:rPr sz="2391" i="1">
+                                <a:solidFill>
+                                  <a:srgbClr val="52575F"/>
+                                </a:solidFill>
+                                <a:latin typeface="Cambria Math" panose="02040503050406030204" pitchFamily="18" charset="0"/>
+                              </a:rPr>
+                            </m:ctrlPr>
+                          </m:limLowPr>
+                          <m:e>
+                            <m:r>
+                              <a:rPr sz="2391" i="1">
+                                <a:solidFill>
+                                  <a:srgbClr val="52575F"/>
+                                </a:solidFill>
+                                <a:latin typeface="Cambria Math" panose="02040503050406030204" pitchFamily="18" charset="0"/>
+                              </a:rPr>
+                              <m:t>∑</m:t>
+                            </m:r>
+                          </m:e>
+                          <m:lim>
+                            <m:r>
+                              <a:rPr sz="2391" i="1">
+                                <a:solidFill>
+                                  <a:srgbClr val="52575F"/>
+                                </a:solidFill>
+                                <a:latin typeface="Cambria Math" panose="02040503050406030204" pitchFamily="18" charset="0"/>
+                              </a:rPr>
+                              <m:t>𝑖</m:t>
+                            </m:r>
+                            <m:r>
+                              <a:rPr sz="2391" i="1">
+                                <a:solidFill>
+                                  <a:srgbClr val="52575F"/>
+                                </a:solidFill>
+                                <a:latin typeface="Cambria Math" panose="02040503050406030204" pitchFamily="18" charset="0"/>
+                              </a:rPr>
+                              <m:t>=1</m:t>
+                            </m:r>
+                          </m:lim>
+                        </m:limLow>
+                      </m:e>
+                      <m:lim>
+                        <m:r>
+                          <a:rPr sz="2391" i="1">
+                            <a:solidFill>
+                              <a:srgbClr val="52575F"/>
+                            </a:solidFill>
+                            <a:latin typeface="Cambria Math" panose="02040503050406030204" pitchFamily="18" charset="0"/>
+                          </a:rPr>
+                          <m:t>𝑛</m:t>
+                        </m:r>
+                      </m:lim>
+                    </m:limUpp>
+                    <m:sSup>
+                      <m:sSupPr>
+                        <m:ctrlPr>
+                          <a:rPr sz="2391" i="1">
+                            <a:solidFill>
+                              <a:srgbClr val="52575F"/>
+                            </a:solidFill>
+                            <a:latin typeface="Cambria Math" panose="02040503050406030204" pitchFamily="18" charset="0"/>
+                          </a:rPr>
+                        </m:ctrlPr>
+                      </m:sSupPr>
+                      <m:e>
+                        <m:d>
+                          <m:dPr>
+                            <m:ctrlPr>
+                              <a:rPr sz="2391" i="1">
+                                <a:solidFill>
+                                  <a:srgbClr val="52575F"/>
+                                </a:solidFill>
+                                <a:latin typeface="Cambria Math" panose="02040503050406030204" pitchFamily="18" charset="0"/>
+                              </a:rPr>
+                            </m:ctrlPr>
+                          </m:dPr>
+                          <m:e>
+                            <m:sSub>
+                              <m:sSubPr>
+                                <m:ctrlPr>
+                                  <a:rPr sz="2391" i="1">
+                                    <a:solidFill>
+                                      <a:srgbClr val="52575F"/>
+                                    </a:solidFill>
+                                    <a:latin typeface="Cambria Math" panose="02040503050406030204" pitchFamily="18" charset="0"/>
+                                  </a:rPr>
+                                </m:ctrlPr>
+                              </m:sSubPr>
+                              <m:e>
+                                <m:r>
+                                  <a:rPr sz="2391" i="1">
+                                    <a:solidFill>
+                                      <a:srgbClr val="52575F"/>
+                                    </a:solidFill>
+                                    <a:latin typeface="Cambria Math" panose="02040503050406030204" pitchFamily="18" charset="0"/>
+                                  </a:rPr>
+                                  <m:t>𝑦</m:t>
+                                </m:r>
+                              </m:e>
+                              <m:sub>
+                                <m:r>
+                                  <a:rPr sz="2391" i="1">
+                                    <a:solidFill>
+                                      <a:srgbClr val="52575F"/>
+                                    </a:solidFill>
+                                    <a:latin typeface="Cambria Math" panose="02040503050406030204" pitchFamily="18" charset="0"/>
+                                  </a:rPr>
+                                  <m:t>𝑖</m:t>
+                                </m:r>
+                              </m:sub>
+                            </m:sSub>
+                            <m:r>
+                              <a:rPr sz="2391" i="1">
+                                <a:solidFill>
+                                  <a:srgbClr val="52575F"/>
+                                </a:solidFill>
+                                <a:latin typeface="Cambria Math" panose="02040503050406030204" pitchFamily="18" charset="0"/>
+                              </a:rPr>
+                              <m:t>−</m:t>
+                            </m:r>
+                            <m:sSub>
+                              <m:sSubPr>
+                                <m:ctrlPr>
+                                  <a:rPr sz="2391" i="1">
+                                    <a:solidFill>
+                                      <a:srgbClr val="52575F"/>
+                                    </a:solidFill>
+                                    <a:latin typeface="Cambria Math" panose="02040503050406030204" pitchFamily="18" charset="0"/>
+                                  </a:rPr>
+                                </m:ctrlPr>
+                              </m:sSubPr>
+                              <m:e>
+                                <m:r>
+                                  <a:rPr sz="2391" i="1">
+                                    <a:solidFill>
+                                      <a:srgbClr val="52575F"/>
+                                    </a:solidFill>
+                                    <a:latin typeface="Cambria Math" panose="02040503050406030204" pitchFamily="18" charset="0"/>
+                                  </a:rPr>
+                                  <m:t>𝛽</m:t>
+                                </m:r>
+                              </m:e>
+                              <m:sub>
+                                <m:r>
+                                  <a:rPr sz="2391" i="1">
+                                    <a:solidFill>
+                                      <a:srgbClr val="52575F"/>
+                                    </a:solidFill>
+                                    <a:latin typeface="Cambria Math" panose="02040503050406030204" pitchFamily="18" charset="0"/>
+                                  </a:rPr>
+                                  <m:t>0</m:t>
+                                </m:r>
+                              </m:sub>
+                            </m:sSub>
+                            <m:r>
+                              <a:rPr sz="2391" i="1">
+                                <a:solidFill>
+                                  <a:srgbClr val="52575F"/>
+                                </a:solidFill>
+                                <a:latin typeface="Cambria Math" panose="02040503050406030204" pitchFamily="18" charset="0"/>
+                              </a:rPr>
+                              <m:t>−</m:t>
+                            </m:r>
+                            <m:limUpp>
+                              <m:limUppPr>
+                                <m:ctrlPr>
+                                  <a:rPr sz="2391" i="1">
+                                    <a:solidFill>
+                                      <a:srgbClr val="52575F"/>
+                                    </a:solidFill>
+                                    <a:latin typeface="Cambria Math" panose="02040503050406030204" pitchFamily="18" charset="0"/>
+                                  </a:rPr>
+                                </m:ctrlPr>
+                              </m:limUppPr>
+                              <m:e>
+                                <m:limLow>
+                                  <m:limLowPr>
+                                    <m:ctrlPr>
+                                      <a:rPr sz="2391" i="1">
+                                        <a:solidFill>
+                                          <a:srgbClr val="52575F"/>
+                                        </a:solidFill>
+                                        <a:latin typeface="Cambria Math" panose="02040503050406030204" pitchFamily="18" charset="0"/>
+                                      </a:rPr>
+                                    </m:ctrlPr>
+                                  </m:limLowPr>
+                                  <m:e>
+                                    <m:r>
+                                      <a:rPr sz="2391" i="1">
+                                        <a:solidFill>
+                                          <a:srgbClr val="52575F"/>
+                                        </a:solidFill>
+                                        <a:latin typeface="Cambria Math" panose="02040503050406030204" pitchFamily="18" charset="0"/>
+                                      </a:rPr>
+                                      <m:t>∑</m:t>
+                                    </m:r>
+                                  </m:e>
+                                  <m:lim>
+                                    <m:r>
+                                      <a:rPr sz="2391" i="1">
+                                        <a:solidFill>
+                                          <a:srgbClr val="52575F"/>
+                                        </a:solidFill>
+                                        <a:latin typeface="Cambria Math" panose="02040503050406030204" pitchFamily="18" charset="0"/>
+                                      </a:rPr>
+                                      <m:t>𝑗</m:t>
+                                    </m:r>
+                                    <m:r>
+                                      <a:rPr sz="2391" i="1">
+                                        <a:solidFill>
+                                          <a:srgbClr val="52575F"/>
+                                        </a:solidFill>
+                                        <a:latin typeface="Cambria Math" panose="02040503050406030204" pitchFamily="18" charset="0"/>
+                                      </a:rPr>
+                                      <m:t>=1</m:t>
+                                    </m:r>
+                                  </m:lim>
+                                </m:limLow>
+                              </m:e>
+                              <m:lim>
+                                <m:r>
+                                  <a:rPr sz="2391" i="1">
+                                    <a:solidFill>
+                                      <a:srgbClr val="52575F"/>
+                                    </a:solidFill>
+                                    <a:latin typeface="Cambria Math" panose="02040503050406030204" pitchFamily="18" charset="0"/>
+                                  </a:rPr>
+                                  <m:t>𝑝</m:t>
+                                </m:r>
+                              </m:lim>
+                            </m:limUpp>
+                            <m:sSub>
+                              <m:sSubPr>
+                                <m:ctrlPr>
+                                  <a:rPr sz="2391" i="1">
+                                    <a:solidFill>
+                                      <a:srgbClr val="52575F"/>
+                                    </a:solidFill>
+                                    <a:latin typeface="Cambria Math" panose="02040503050406030204" pitchFamily="18" charset="0"/>
+                                  </a:rPr>
+                                </m:ctrlPr>
+                              </m:sSubPr>
+                              <m:e>
+                                <m:r>
+                                  <a:rPr sz="2391" i="1">
+                                    <a:solidFill>
+                                      <a:srgbClr val="52575F"/>
+                                    </a:solidFill>
+                                    <a:latin typeface="Cambria Math" panose="02040503050406030204" pitchFamily="18" charset="0"/>
+                                  </a:rPr>
+                                  <m:t>𝛽</m:t>
+                                </m:r>
+                              </m:e>
+                              <m:sub>
+                                <m:r>
+                                  <a:rPr sz="2391" i="1">
+                                    <a:solidFill>
+                                      <a:srgbClr val="52575F"/>
+                                    </a:solidFill>
+                                    <a:latin typeface="Cambria Math" panose="02040503050406030204" pitchFamily="18" charset="0"/>
+                                  </a:rPr>
+                                  <m:t>𝑗</m:t>
+                                </m:r>
+                              </m:sub>
+                            </m:sSub>
+                            <m:sSub>
+                              <m:sSubPr>
+                                <m:ctrlPr>
+                                  <a:rPr sz="2391" i="1">
+                                    <a:solidFill>
+                                      <a:srgbClr val="52575F"/>
+                                    </a:solidFill>
+                                    <a:latin typeface="Cambria Math" panose="02040503050406030204" pitchFamily="18" charset="0"/>
+                                  </a:rPr>
+                                </m:ctrlPr>
+                              </m:sSubPr>
+                              <m:e>
+                                <m:r>
+                                  <a:rPr sz="2391" i="1">
+                                    <a:solidFill>
+                                      <a:srgbClr val="52575F"/>
+                                    </a:solidFill>
+                                    <a:latin typeface="Cambria Math" panose="02040503050406030204" pitchFamily="18" charset="0"/>
+                                  </a:rPr>
+                                  <m:t>𝑥</m:t>
+                                </m:r>
+                              </m:e>
+                              <m:sub>
+                                <m:r>
+                                  <a:rPr sz="2391" i="1">
+                                    <a:solidFill>
+                                      <a:srgbClr val="52575F"/>
+                                    </a:solidFill>
+                                    <a:latin typeface="Cambria Math" panose="02040503050406030204" pitchFamily="18" charset="0"/>
+                                  </a:rPr>
+                                  <m:t>𝑖𝑗</m:t>
+                                </m:r>
+                              </m:sub>
+                            </m:sSub>
+                          </m:e>
+                        </m:d>
+                      </m:e>
+                      <m:sup>
+                        <m:r>
+                          <a:rPr sz="2391" i="1">
+                            <a:solidFill>
+                              <a:srgbClr val="52575F"/>
+                            </a:solidFill>
+                            <a:latin typeface="Cambria Math" panose="02040503050406030204" pitchFamily="18" charset="0"/>
+                          </a:rPr>
+                          <m:t>2</m:t>
+                        </m:r>
+                      </m:sup>
+                    </m:sSup>
+                    <m:r>
+                      <a:rPr sz="2391" i="1">
+                        <a:solidFill>
+                          <a:srgbClr val="52575F"/>
+                        </a:solidFill>
+                        <a:latin typeface="Cambria Math" panose="02040503050406030204" pitchFamily="18" charset="0"/>
+                      </a:rPr>
+                      <m:t>+</m:t>
+                    </m:r>
+                    <m:r>
+                      <a:rPr sz="2391" i="1">
+                        <a:solidFill>
+                          <a:srgbClr val="52575F"/>
+                        </a:solidFill>
+                        <a:latin typeface="Cambria Math" panose="02040503050406030204" pitchFamily="18" charset="0"/>
+                      </a:rPr>
+                      <m:t>𝛼</m:t>
+                    </m:r>
+                    <m:limUpp>
+                      <m:limUppPr>
+                        <m:ctrlPr>
+                          <a:rPr sz="2391" i="1">
+                            <a:solidFill>
+                              <a:srgbClr val="52575F"/>
+                            </a:solidFill>
+                            <a:latin typeface="Cambria Math" panose="02040503050406030204" pitchFamily="18" charset="0"/>
+                          </a:rPr>
+                        </m:ctrlPr>
+                      </m:limUppPr>
+                      <m:e>
+                        <m:limLow>
+                          <m:limLowPr>
+                            <m:ctrlPr>
+                              <a:rPr sz="2391" i="1">
+                                <a:solidFill>
+                                  <a:srgbClr val="52575F"/>
+                                </a:solidFill>
+                                <a:latin typeface="Cambria Math" panose="02040503050406030204" pitchFamily="18" charset="0"/>
+                              </a:rPr>
+                            </m:ctrlPr>
+                          </m:limLowPr>
+                          <m:e>
+                            <m:r>
+                              <a:rPr sz="2391" i="1">
+                                <a:solidFill>
+                                  <a:srgbClr val="52575F"/>
+                                </a:solidFill>
+                                <a:latin typeface="Cambria Math" panose="02040503050406030204" pitchFamily="18" charset="0"/>
+                              </a:rPr>
+                              <m:t>∑</m:t>
+                            </m:r>
+                          </m:e>
+                          <m:lim>
+                            <m:r>
+                              <a:rPr sz="2391" i="1">
+                                <a:solidFill>
+                                  <a:srgbClr val="52575F"/>
+                                </a:solidFill>
+                                <a:latin typeface="Cambria Math" panose="02040503050406030204" pitchFamily="18" charset="0"/>
+                              </a:rPr>
+                              <m:t>𝑗</m:t>
+                            </m:r>
+                            <m:r>
+                              <a:rPr sz="2391" i="1">
+                                <a:solidFill>
+                                  <a:srgbClr val="52575F"/>
+                                </a:solidFill>
+                                <a:latin typeface="Cambria Math" panose="02040503050406030204" pitchFamily="18" charset="0"/>
+                              </a:rPr>
+                              <m:t>=1</m:t>
+                            </m:r>
+                          </m:lim>
+                        </m:limLow>
+                      </m:e>
+                      <m:lim>
+                        <m:r>
+                          <a:rPr sz="2391" i="1">
+                            <a:solidFill>
+                              <a:srgbClr val="52575F"/>
+                            </a:solidFill>
+                            <a:latin typeface="Cambria Math" panose="02040503050406030204" pitchFamily="18" charset="0"/>
+                          </a:rPr>
+                          <m:t>𝑝</m:t>
+                        </m:r>
+                      </m:lim>
+                    </m:limUpp>
+                    <m:d>
+                      <m:dPr>
+                        <m:begChr m:val="|"/>
+                        <m:endChr m:val="|"/>
+                        <m:ctrlPr>
+                          <a:rPr sz="2391" i="1">
+                            <a:solidFill>
+                              <a:srgbClr val="52575F"/>
+                            </a:solidFill>
+                            <a:latin typeface="Cambria Math" panose="02040503050406030204" pitchFamily="18" charset="0"/>
+                          </a:rPr>
+                        </m:ctrlPr>
+                      </m:dPr>
+                      <m:e>
+                        <m:sSub>
+                          <m:sSubPr>
+                            <m:ctrlPr>
+                              <a:rPr sz="2391" i="1">
+                                <a:solidFill>
+                                  <a:srgbClr val="52575F"/>
+                                </a:solidFill>
+                                <a:latin typeface="Cambria Math" panose="02040503050406030204" pitchFamily="18" charset="0"/>
+                              </a:rPr>
+                            </m:ctrlPr>
+                          </m:sSubPr>
+                          <m:e>
+                            <m:r>
+                              <a:rPr sz="2391" i="1">
+                                <a:solidFill>
+                                  <a:srgbClr val="52575F"/>
+                                </a:solidFill>
+                                <a:latin typeface="Cambria Math" panose="02040503050406030204" pitchFamily="18" charset="0"/>
+                              </a:rPr>
+                              <m:t>𝛽</m:t>
+                            </m:r>
+                          </m:e>
+                          <m:sub>
+                            <m:r>
+                              <a:rPr sz="2391" i="1">
+                                <a:solidFill>
+                                  <a:srgbClr val="52575F"/>
+                                </a:solidFill>
+                                <a:latin typeface="Cambria Math" panose="02040503050406030204" pitchFamily="18" charset="0"/>
+                              </a:rPr>
+                              <m:t>𝑗</m:t>
+                            </m:r>
+                          </m:sub>
+                        </m:sSub>
+                      </m:e>
+                    </m:d>
+                  </m:oMath>
+                </a14:m>
+                <a:r>
+                  <a:rPr lang="en-US"/>
+                  <a:t>,  </a:t>
+                </a:r>
+                <a:r>
+                  <a:t> (where </a:t>
+                </a:r>
+                <a14:m>
+                  <m:oMath xmlns:m="http://schemas.openxmlformats.org/officeDocument/2006/math">
+                    <m:r>
+                      <a:rPr sz="2391" i="1">
+                        <a:solidFill>
+                          <a:srgbClr val="52575F"/>
+                        </a:solidFill>
+                        <a:latin typeface="Cambria Math" panose="02040503050406030204" pitchFamily="18" charset="0"/>
+                      </a:rPr>
+                      <m:t>𝛼</m:t>
+                    </m:r>
+                    <m:r>
+                      <a:rPr sz="2391" i="1">
+                        <a:solidFill>
+                          <a:srgbClr val="52575F"/>
+                        </a:solidFill>
+                        <a:latin typeface="Cambria Math" panose="02040503050406030204" pitchFamily="18" charset="0"/>
+                      </a:rPr>
+                      <m:t>&gt;0</m:t>
+                    </m:r>
+                  </m:oMath>
+                </a14:m>
+                <a:r>
+                  <a:t>)</a:t>
+                </a:r>
+              </a:p>
+              <a:p>
+                <a:r>
+                  <a:rPr b="1" u="sng">
+                    <a:latin typeface="Graphik"/>
+                    <a:ea typeface="Graphik"/>
+                    <a:cs typeface="Graphik"/>
+                    <a:sym typeface="Graphik"/>
+                  </a:rPr>
+                  <a:t>Ridge</a:t>
+                </a:r>
+                <a:r>
+                  <a:t> linear regression cost function </a:t>
+                </a:r>
+                <a:br>
+                  <a:rPr/>
+                </a:br>
+                <a14:m>
+                  <m:oMath xmlns:m="http://schemas.openxmlformats.org/officeDocument/2006/math">
+                    <m:sSub>
+                      <m:sSubPr>
+                        <m:ctrlPr>
+                          <a:rPr sz="2391" i="1">
+                            <a:solidFill>
+                              <a:srgbClr val="52575F"/>
+                            </a:solidFill>
+                            <a:latin typeface="Cambria Math" panose="02040503050406030204" pitchFamily="18" charset="0"/>
+                          </a:rPr>
+                        </m:ctrlPr>
+                      </m:sSubPr>
+                      <m:e>
+                        <m:r>
+                          <a:rPr sz="2391" i="1">
+                            <a:solidFill>
+                              <a:srgbClr val="52575F"/>
+                            </a:solidFill>
+                            <a:latin typeface="Cambria Math" panose="02040503050406030204" pitchFamily="18" charset="0"/>
+                          </a:rPr>
+                          <m:t>𝐽</m:t>
+                        </m:r>
+                      </m:e>
+                      <m:sub>
+                        <m:r>
+                          <a:rPr sz="2391" i="1">
+                            <a:solidFill>
+                              <a:srgbClr val="52575F"/>
+                            </a:solidFill>
+                            <a:latin typeface="Cambria Math" panose="02040503050406030204" pitchFamily="18" charset="0"/>
+                          </a:rPr>
+                          <m:t>𝑟𝑖𝑑𝑔𝑒</m:t>
+                        </m:r>
+                      </m:sub>
+                    </m:sSub>
+                    <m:r>
+                      <a:rPr sz="2391" i="1">
+                        <a:solidFill>
+                          <a:srgbClr val="52575F"/>
+                        </a:solidFill>
+                        <a:latin typeface="Cambria Math" panose="02040503050406030204" pitchFamily="18" charset="0"/>
+                      </a:rPr>
+                      <m:t>(</m:t>
+                    </m:r>
+                    <m:r>
+                      <a:rPr sz="2391" i="1">
+                        <a:solidFill>
+                          <a:srgbClr val="52575F"/>
+                        </a:solidFill>
+                        <a:latin typeface="Cambria Math" panose="02040503050406030204" pitchFamily="18" charset="0"/>
+                      </a:rPr>
+                      <m:t>𝛽</m:t>
+                    </m:r>
+                    <m:r>
+                      <a:rPr sz="2391" i="1">
+                        <a:solidFill>
+                          <a:srgbClr val="52575F"/>
+                        </a:solidFill>
+                        <a:latin typeface="Cambria Math" panose="02040503050406030204" pitchFamily="18" charset="0"/>
+                      </a:rPr>
+                      <m:t>)=</m:t>
+                    </m:r>
+                    <m:f>
+                      <m:fPr>
+                        <m:ctrlPr>
+                          <a:rPr sz="2391" i="1">
+                            <a:solidFill>
+                              <a:srgbClr val="52575F"/>
+                            </a:solidFill>
+                            <a:latin typeface="Cambria Math" panose="02040503050406030204" pitchFamily="18" charset="0"/>
+                          </a:rPr>
+                        </m:ctrlPr>
+                      </m:fPr>
+                      <m:num>
+                        <m:r>
+                          <a:rPr sz="2391" i="1">
+                            <a:solidFill>
+                              <a:srgbClr val="52575F"/>
+                            </a:solidFill>
+                            <a:latin typeface="Cambria Math" panose="02040503050406030204" pitchFamily="18" charset="0"/>
+                          </a:rPr>
+                          <m:t>1</m:t>
+                        </m:r>
+                      </m:num>
+                      <m:den>
+                        <m:r>
+                          <a:rPr sz="2391" i="1">
+                            <a:solidFill>
+                              <a:srgbClr val="52575F"/>
+                            </a:solidFill>
+                            <a:latin typeface="Cambria Math" panose="02040503050406030204" pitchFamily="18" charset="0"/>
+                          </a:rPr>
+                          <m:t>𝑛</m:t>
+                        </m:r>
+                      </m:den>
+                    </m:f>
+                    <m:limUpp>
+                      <m:limUppPr>
+                        <m:ctrlPr>
+                          <a:rPr sz="2391" i="1">
+                            <a:solidFill>
+                              <a:srgbClr val="52575F"/>
+                            </a:solidFill>
+                            <a:latin typeface="Cambria Math" panose="02040503050406030204" pitchFamily="18" charset="0"/>
+                          </a:rPr>
+                        </m:ctrlPr>
+                      </m:limUppPr>
+                      <m:e>
+                        <m:limLow>
+                          <m:limLowPr>
+                            <m:ctrlPr>
+                              <a:rPr sz="2391" i="1">
+                                <a:solidFill>
+                                  <a:srgbClr val="52575F"/>
+                                </a:solidFill>
+                                <a:latin typeface="Cambria Math" panose="02040503050406030204" pitchFamily="18" charset="0"/>
+                              </a:rPr>
+                            </m:ctrlPr>
+                          </m:limLowPr>
+                          <m:e>
+                            <m:r>
+                              <a:rPr sz="2391" i="1">
+                                <a:solidFill>
+                                  <a:srgbClr val="52575F"/>
+                                </a:solidFill>
+                                <a:latin typeface="Cambria Math" panose="02040503050406030204" pitchFamily="18" charset="0"/>
+                              </a:rPr>
+                              <m:t>∑</m:t>
+                            </m:r>
+                          </m:e>
+                          <m:lim>
+                            <m:r>
+                              <a:rPr sz="2391" i="1">
+                                <a:solidFill>
+                                  <a:srgbClr val="52575F"/>
+                                </a:solidFill>
+                                <a:latin typeface="Cambria Math" panose="02040503050406030204" pitchFamily="18" charset="0"/>
+                              </a:rPr>
+                              <m:t>𝑖</m:t>
+                            </m:r>
+                            <m:r>
+                              <a:rPr sz="2391" i="1">
+                                <a:solidFill>
+                                  <a:srgbClr val="52575F"/>
+                                </a:solidFill>
+                                <a:latin typeface="Cambria Math" panose="02040503050406030204" pitchFamily="18" charset="0"/>
+                              </a:rPr>
+                              <m:t>=1</m:t>
+                            </m:r>
+                          </m:lim>
+                        </m:limLow>
+                      </m:e>
+                      <m:lim>
+                        <m:r>
+                          <a:rPr sz="2391" i="1">
+                            <a:solidFill>
+                              <a:srgbClr val="52575F"/>
+                            </a:solidFill>
+                            <a:latin typeface="Cambria Math" panose="02040503050406030204" pitchFamily="18" charset="0"/>
+                          </a:rPr>
+                          <m:t>𝑛</m:t>
+                        </m:r>
+                      </m:lim>
+                    </m:limUpp>
+                    <m:sSup>
+                      <m:sSupPr>
+                        <m:ctrlPr>
+                          <a:rPr sz="2391" i="1">
+                            <a:solidFill>
+                              <a:srgbClr val="52575F"/>
+                            </a:solidFill>
+                            <a:latin typeface="Cambria Math" panose="02040503050406030204" pitchFamily="18" charset="0"/>
+                          </a:rPr>
+                        </m:ctrlPr>
+                      </m:sSupPr>
+                      <m:e>
+                        <m:d>
+                          <m:dPr>
+                            <m:ctrlPr>
+                              <a:rPr sz="2391" i="1">
+                                <a:solidFill>
+                                  <a:srgbClr val="52575F"/>
+                                </a:solidFill>
+                                <a:latin typeface="Cambria Math" panose="02040503050406030204" pitchFamily="18" charset="0"/>
+                              </a:rPr>
+                            </m:ctrlPr>
+                          </m:dPr>
+                          <m:e>
+                            <m:sSub>
+                              <m:sSubPr>
+                                <m:ctrlPr>
+                                  <a:rPr sz="2391" i="1">
+                                    <a:solidFill>
+                                      <a:srgbClr val="52575F"/>
+                                    </a:solidFill>
+                                    <a:latin typeface="Cambria Math" panose="02040503050406030204" pitchFamily="18" charset="0"/>
+                                  </a:rPr>
+                                </m:ctrlPr>
+                              </m:sSubPr>
+                              <m:e>
+                                <m:r>
+                                  <a:rPr sz="2391" i="1">
+                                    <a:solidFill>
+                                      <a:srgbClr val="52575F"/>
+                                    </a:solidFill>
+                                    <a:latin typeface="Cambria Math" panose="02040503050406030204" pitchFamily="18" charset="0"/>
+                                  </a:rPr>
+                                  <m:t>𝑦</m:t>
+                                </m:r>
+                              </m:e>
+                              <m:sub>
+                                <m:r>
+                                  <a:rPr sz="2391" i="1">
+                                    <a:solidFill>
+                                      <a:srgbClr val="52575F"/>
+                                    </a:solidFill>
+                                    <a:latin typeface="Cambria Math" panose="02040503050406030204" pitchFamily="18" charset="0"/>
+                                  </a:rPr>
+                                  <m:t>𝑖</m:t>
+                                </m:r>
+                              </m:sub>
+                            </m:sSub>
+                            <m:r>
+                              <a:rPr sz="2391" i="1">
+                                <a:solidFill>
+                                  <a:srgbClr val="52575F"/>
+                                </a:solidFill>
+                                <a:latin typeface="Cambria Math" panose="02040503050406030204" pitchFamily="18" charset="0"/>
+                              </a:rPr>
+                              <m:t>−</m:t>
+                            </m:r>
+                            <m:sSub>
+                              <m:sSubPr>
+                                <m:ctrlPr>
+                                  <a:rPr sz="2391" i="1">
+                                    <a:solidFill>
+                                      <a:srgbClr val="52575F"/>
+                                    </a:solidFill>
+                                    <a:latin typeface="Cambria Math" panose="02040503050406030204" pitchFamily="18" charset="0"/>
+                                  </a:rPr>
+                                </m:ctrlPr>
+                              </m:sSubPr>
+                              <m:e>
+                                <m:r>
+                                  <a:rPr sz="2391" i="1">
+                                    <a:solidFill>
+                                      <a:srgbClr val="52575F"/>
+                                    </a:solidFill>
+                                    <a:latin typeface="Cambria Math" panose="02040503050406030204" pitchFamily="18" charset="0"/>
+                                  </a:rPr>
+                                  <m:t>𝛽</m:t>
+                                </m:r>
+                              </m:e>
+                              <m:sub>
+                                <m:r>
+                                  <a:rPr sz="2391" i="1">
+                                    <a:solidFill>
+                                      <a:srgbClr val="52575F"/>
+                                    </a:solidFill>
+                                    <a:latin typeface="Cambria Math" panose="02040503050406030204" pitchFamily="18" charset="0"/>
+                                  </a:rPr>
+                                  <m:t>0</m:t>
+                                </m:r>
+                              </m:sub>
+                            </m:sSub>
+                            <m:r>
+                              <a:rPr sz="2391" i="1">
+                                <a:solidFill>
+                                  <a:srgbClr val="52575F"/>
+                                </a:solidFill>
+                                <a:latin typeface="Cambria Math" panose="02040503050406030204" pitchFamily="18" charset="0"/>
+                              </a:rPr>
+                              <m:t>−</m:t>
+                            </m:r>
+                            <m:limUpp>
+                              <m:limUppPr>
+                                <m:ctrlPr>
+                                  <a:rPr sz="2391" i="1">
+                                    <a:solidFill>
+                                      <a:srgbClr val="52575F"/>
+                                    </a:solidFill>
+                                    <a:latin typeface="Cambria Math" panose="02040503050406030204" pitchFamily="18" charset="0"/>
+                                  </a:rPr>
+                                </m:ctrlPr>
+                              </m:limUppPr>
+                              <m:e>
+                                <m:limLow>
+                                  <m:limLowPr>
+                                    <m:ctrlPr>
+                                      <a:rPr sz="2391" i="1">
+                                        <a:solidFill>
+                                          <a:srgbClr val="52575F"/>
+                                        </a:solidFill>
+                                        <a:latin typeface="Cambria Math" panose="02040503050406030204" pitchFamily="18" charset="0"/>
+                                      </a:rPr>
+                                    </m:ctrlPr>
+                                  </m:limLowPr>
+                                  <m:e>
+                                    <m:r>
+                                      <a:rPr sz="2391" i="1">
+                                        <a:solidFill>
+                                          <a:srgbClr val="52575F"/>
+                                        </a:solidFill>
+                                        <a:latin typeface="Cambria Math" panose="02040503050406030204" pitchFamily="18" charset="0"/>
+                                      </a:rPr>
+                                      <m:t>∑</m:t>
+                                    </m:r>
+                                  </m:e>
+                                  <m:lim>
+                                    <m:r>
+                                      <a:rPr sz="2391" i="1">
+                                        <a:solidFill>
+                                          <a:srgbClr val="52575F"/>
+                                        </a:solidFill>
+                                        <a:latin typeface="Cambria Math" panose="02040503050406030204" pitchFamily="18" charset="0"/>
+                                      </a:rPr>
+                                      <m:t>𝑗</m:t>
+                                    </m:r>
+                                    <m:r>
+                                      <a:rPr sz="2391" i="1">
+                                        <a:solidFill>
+                                          <a:srgbClr val="52575F"/>
+                                        </a:solidFill>
+                                        <a:latin typeface="Cambria Math" panose="02040503050406030204" pitchFamily="18" charset="0"/>
+                                      </a:rPr>
+                                      <m:t>=1</m:t>
+                                    </m:r>
+                                  </m:lim>
+                                </m:limLow>
+                              </m:e>
+                              <m:lim>
+                                <m:r>
+                                  <a:rPr sz="2391" i="1">
+                                    <a:solidFill>
+                                      <a:srgbClr val="52575F"/>
+                                    </a:solidFill>
+                                    <a:latin typeface="Cambria Math" panose="02040503050406030204" pitchFamily="18" charset="0"/>
+                                  </a:rPr>
+                                  <m:t>𝑝</m:t>
+                                </m:r>
+                              </m:lim>
+                            </m:limUpp>
+                            <m:sSub>
+                              <m:sSubPr>
+                                <m:ctrlPr>
+                                  <a:rPr sz="2391" i="1">
+                                    <a:solidFill>
+                                      <a:srgbClr val="52575F"/>
+                                    </a:solidFill>
+                                    <a:latin typeface="Cambria Math" panose="02040503050406030204" pitchFamily="18" charset="0"/>
+                                  </a:rPr>
+                                </m:ctrlPr>
+                              </m:sSubPr>
+                              <m:e>
+                                <m:r>
+                                  <a:rPr sz="2391" i="1">
+                                    <a:solidFill>
+                                      <a:srgbClr val="52575F"/>
+                                    </a:solidFill>
+                                    <a:latin typeface="Cambria Math" panose="02040503050406030204" pitchFamily="18" charset="0"/>
+                                  </a:rPr>
+                                  <m:t>𝛽</m:t>
+                                </m:r>
+                              </m:e>
+                              <m:sub>
+                                <m:r>
+                                  <a:rPr sz="2391" i="1">
+                                    <a:solidFill>
+                                      <a:srgbClr val="52575F"/>
+                                    </a:solidFill>
+                                    <a:latin typeface="Cambria Math" panose="02040503050406030204" pitchFamily="18" charset="0"/>
+                                  </a:rPr>
+                                  <m:t>𝑗</m:t>
+                                </m:r>
+                              </m:sub>
+                            </m:sSub>
+                            <m:sSub>
+                              <m:sSubPr>
+                                <m:ctrlPr>
+                                  <a:rPr sz="2391" i="1">
+                                    <a:solidFill>
+                                      <a:srgbClr val="52575F"/>
+                                    </a:solidFill>
+                                    <a:latin typeface="Cambria Math" panose="02040503050406030204" pitchFamily="18" charset="0"/>
+                                  </a:rPr>
+                                </m:ctrlPr>
+                              </m:sSubPr>
+                              <m:e>
+                                <m:r>
+                                  <a:rPr sz="2391" i="1">
+                                    <a:solidFill>
+                                      <a:srgbClr val="52575F"/>
+                                    </a:solidFill>
+                                    <a:latin typeface="Cambria Math" panose="02040503050406030204" pitchFamily="18" charset="0"/>
+                                  </a:rPr>
+                                  <m:t>𝑥</m:t>
+                                </m:r>
+                              </m:e>
+                              <m:sub>
+                                <m:r>
+                                  <a:rPr sz="2391" i="1">
+                                    <a:solidFill>
+                                      <a:srgbClr val="52575F"/>
+                                    </a:solidFill>
+                                    <a:latin typeface="Cambria Math" panose="02040503050406030204" pitchFamily="18" charset="0"/>
+                                  </a:rPr>
+                                  <m:t>𝑖𝑗</m:t>
+                                </m:r>
+                              </m:sub>
+                            </m:sSub>
+                          </m:e>
+                        </m:d>
+                      </m:e>
+                      <m:sup>
+                        <m:r>
+                          <a:rPr sz="2391" i="1">
+                            <a:solidFill>
+                              <a:srgbClr val="52575F"/>
+                            </a:solidFill>
+                            <a:latin typeface="Cambria Math" panose="02040503050406030204" pitchFamily="18" charset="0"/>
+                          </a:rPr>
+                          <m:t>2</m:t>
+                        </m:r>
+                      </m:sup>
+                    </m:sSup>
+                    <m:r>
+                      <a:rPr sz="2391" i="1">
+                        <a:solidFill>
+                          <a:srgbClr val="52575F"/>
+                        </a:solidFill>
+                        <a:latin typeface="Cambria Math" panose="02040503050406030204" pitchFamily="18" charset="0"/>
+                      </a:rPr>
+                      <m:t>+</m:t>
+                    </m:r>
+                    <m:r>
+                      <a:rPr sz="2391" i="1">
+                        <a:solidFill>
+                          <a:srgbClr val="52575F"/>
+                        </a:solidFill>
+                        <a:latin typeface="Cambria Math" panose="02040503050406030204" pitchFamily="18" charset="0"/>
+                      </a:rPr>
+                      <m:t>𝛼</m:t>
+                    </m:r>
+                    <m:limUpp>
+                      <m:limUppPr>
+                        <m:ctrlPr>
+                          <a:rPr sz="2391" i="1">
+                            <a:solidFill>
+                              <a:srgbClr val="52575F"/>
+                            </a:solidFill>
+                            <a:latin typeface="Cambria Math" panose="02040503050406030204" pitchFamily="18" charset="0"/>
+                          </a:rPr>
+                        </m:ctrlPr>
+                      </m:limUppPr>
+                      <m:e>
+                        <m:limLow>
+                          <m:limLowPr>
+                            <m:ctrlPr>
+                              <a:rPr sz="2391" i="1">
+                                <a:solidFill>
+                                  <a:srgbClr val="52575F"/>
+                                </a:solidFill>
+                                <a:latin typeface="Cambria Math" panose="02040503050406030204" pitchFamily="18" charset="0"/>
+                              </a:rPr>
+                            </m:ctrlPr>
+                          </m:limLowPr>
+                          <m:e>
+                            <m:r>
+                              <a:rPr sz="2391" i="1">
+                                <a:solidFill>
+                                  <a:srgbClr val="52575F"/>
+                                </a:solidFill>
+                                <a:latin typeface="Cambria Math" panose="02040503050406030204" pitchFamily="18" charset="0"/>
+                              </a:rPr>
+                              <m:t>∑</m:t>
+                            </m:r>
+                          </m:e>
+                          <m:lim>
+                            <m:r>
+                              <a:rPr sz="2391" i="1">
+                                <a:solidFill>
+                                  <a:srgbClr val="52575F"/>
+                                </a:solidFill>
+                                <a:latin typeface="Cambria Math" panose="02040503050406030204" pitchFamily="18" charset="0"/>
+                              </a:rPr>
+                              <m:t>𝑗</m:t>
+                            </m:r>
+                            <m:r>
+                              <a:rPr sz="2391" i="1">
+                                <a:solidFill>
+                                  <a:srgbClr val="52575F"/>
+                                </a:solidFill>
+                                <a:latin typeface="Cambria Math" panose="02040503050406030204" pitchFamily="18" charset="0"/>
+                              </a:rPr>
+                              <m:t>=1</m:t>
+                            </m:r>
+                          </m:lim>
+                        </m:limLow>
+                      </m:e>
+                      <m:lim>
+                        <m:r>
+                          <a:rPr sz="2391" i="1">
+                            <a:solidFill>
+                              <a:srgbClr val="52575F"/>
+                            </a:solidFill>
+                            <a:latin typeface="Cambria Math" panose="02040503050406030204" pitchFamily="18" charset="0"/>
+                          </a:rPr>
+                          <m:t>𝑝</m:t>
+                        </m:r>
+                      </m:lim>
+                    </m:limUpp>
+                    <m:sSup>
+                      <m:sSupPr>
+                        <m:ctrlPr>
+                          <a:rPr sz="2391" i="1">
+                            <a:solidFill>
+                              <a:srgbClr val="52575F"/>
+                            </a:solidFill>
+                            <a:latin typeface="Cambria Math" panose="02040503050406030204" pitchFamily="18" charset="0"/>
+                          </a:rPr>
+                        </m:ctrlPr>
+                      </m:sSupPr>
+                      <m:e>
+                        <m:d>
+                          <m:dPr>
+                            <m:ctrlPr>
+                              <a:rPr sz="2391" i="1">
+                                <a:solidFill>
+                                  <a:srgbClr val="52575F"/>
+                                </a:solidFill>
+                                <a:latin typeface="Cambria Math" panose="02040503050406030204" pitchFamily="18" charset="0"/>
+                              </a:rPr>
+                            </m:ctrlPr>
+                          </m:dPr>
+                          <m:e>
+                            <m:sSub>
+                              <m:sSubPr>
+                                <m:ctrlPr>
+                                  <a:rPr sz="2391" i="1">
+                                    <a:solidFill>
+                                      <a:srgbClr val="52575F"/>
+                                    </a:solidFill>
+                                    <a:latin typeface="Cambria Math" panose="02040503050406030204" pitchFamily="18" charset="0"/>
+                                  </a:rPr>
+                                </m:ctrlPr>
+                              </m:sSubPr>
+                              <m:e>
+                                <m:r>
+                                  <a:rPr sz="2391" i="1">
+                                    <a:solidFill>
+                                      <a:srgbClr val="52575F"/>
+                                    </a:solidFill>
+                                    <a:latin typeface="Cambria Math" panose="02040503050406030204" pitchFamily="18" charset="0"/>
+                                  </a:rPr>
+                                  <m:t>𝛽</m:t>
+                                </m:r>
+                              </m:e>
+                              <m:sub>
+                                <m:r>
+                                  <a:rPr sz="2391" i="1">
+                                    <a:solidFill>
+                                      <a:srgbClr val="52575F"/>
+                                    </a:solidFill>
+                                    <a:latin typeface="Cambria Math" panose="02040503050406030204" pitchFamily="18" charset="0"/>
+                                  </a:rPr>
+                                  <m:t>𝑗</m:t>
+                                </m:r>
+                              </m:sub>
+                            </m:sSub>
+                          </m:e>
+                        </m:d>
+                      </m:e>
+                      <m:sup>
+                        <m:r>
+                          <a:rPr sz="2391" i="1">
+                            <a:solidFill>
+                              <a:srgbClr val="52575F"/>
+                            </a:solidFill>
+                            <a:latin typeface="Cambria Math" panose="02040503050406030204" pitchFamily="18" charset="0"/>
+                          </a:rPr>
+                          <m:t>2</m:t>
+                        </m:r>
+                      </m:sup>
+                    </m:sSup>
+                    <m:r>
+                      <a:rPr lang="en-US" sz="2391" b="0" i="1" smtClean="0">
+                        <a:solidFill>
+                          <a:srgbClr val="52575F"/>
+                        </a:solidFill>
+                        <a:latin typeface="Cambria Math" panose="02040503050406030204" pitchFamily="18" charset="0"/>
+                      </a:rPr>
+                      <m:t>,  </m:t>
+                    </m:r>
+                  </m:oMath>
+                </a14:m>
+                <a:r>
+                  <a:t> (where </a:t>
+                </a:r>
+                <a14:m>
+                  <m:oMath xmlns:m="http://schemas.openxmlformats.org/officeDocument/2006/math">
+                    <m:r>
+                      <a:rPr sz="2391" i="1">
+                        <a:solidFill>
+                          <a:srgbClr val="52575F"/>
+                        </a:solidFill>
+                        <a:latin typeface="Cambria Math" panose="02040503050406030204" pitchFamily="18" charset="0"/>
+                      </a:rPr>
+                      <m:t>𝛼</m:t>
+                    </m:r>
+                    <m:r>
+                      <a:rPr sz="2391" i="1">
+                        <a:solidFill>
+                          <a:srgbClr val="52575F"/>
+                        </a:solidFill>
+                        <a:latin typeface="Cambria Math" panose="02040503050406030204" pitchFamily="18" charset="0"/>
+                      </a:rPr>
+                      <m:t>&gt;0</m:t>
+                    </m:r>
+                  </m:oMath>
+                </a14:m>
+                <a:r>
+                  <a:t>)</a:t>
+                </a:r>
+                <a:endParaRPr>
+                  <a:solidFill>
+                    <a:srgbClr val="53585F"/>
+                  </a:solidFill>
+                </a:endParaRPr>
+              </a:p>
+            </p:txBody>
+          </p:sp>
+        </mc:Choice>
+        <mc:Fallback>
+          <p:sp>
+            <p:nvSpPr>
+              <p:cNvPr id="281" name="Lasso linear regression cost function    (where  )…"/>
+              <p:cNvSpPr txBox="1">
+                <a:spLocks noGrp="1" noRot="1" noChangeAspect="1" noMove="1" noResize="1" noEditPoints="1" noAdjustHandles="1" noChangeArrowheads="1" noChangeShapeType="1" noTextEdit="1"/>
+              </p:cNvSpPr>
+              <p:nvPr>
+                <p:ph type="body" idx="1"/>
+              </p:nvPr>
+            </p:nvSpPr>
+            <p:spPr>
+              <a:xfrm>
+                <a:off x="2015133" y="2134195"/>
+                <a:ext cx="9762339" cy="4232672"/>
+              </a:xfrm>
+              <a:prstGeom prst="rect">
+                <a:avLst/>
+              </a:prstGeom>
+              <a:blipFill>
+                <a:blip r:embed="rId2"/>
+                <a:stretch>
+                  <a:fillRect l="-562" t="-576"/>
+                </a:stretch>
+              </a:blipFill>
+            </p:spPr>
+            <p:txBody>
+              <a:bodyPr/>
+              <a:lstStyle/>
+              <a:p>
+                <a:r>
+                  <a:rPr lang="en-US">
+                    <a:noFill/>
+                  </a:rPr>
+                  <a:t> </a:t>
+                </a:r>
+              </a:p>
+            </p:txBody>
+          </p:sp>
+        </mc:Fallback>
+      </mc:AlternateContent>
+      <p:sp>
+        <p:nvSpPr>
+          <p:cNvPr id="282" name="ℓ1 penalty"/>
+          <p:cNvSpPr txBox="1"/>
+          <p:nvPr/>
+        </p:nvSpPr>
+        <p:spPr>
+          <a:xfrm>
+            <a:off x="750366" y="2134195"/>
+            <a:ext cx="1186223" cy="396712"/>
+          </a:xfrm>
+          <a:prstGeom prst="rect">
+            <a:avLst/>
+          </a:prstGeom>
+          <a:ln w="3175">
+            <a:miter lim="400000"/>
+          </a:ln>
+          <a:extLst>
+            <a:ext uri="{C572A759-6A51-4108-AA02-DFA0A04FC94B}">
+              <ma14:wrappingTextBoxFlag xmlns="" xmlns:m="http://schemas.openxmlformats.org/officeDocument/2006/math" xmlns:a14="http://schemas.microsoft.com/office/drawing/2010/main" xmlns:ma14="http://schemas.microsoft.com/office/mac/drawingml/2011/main" val="1"/>
+            </a:ext>
+          </a:extLst>
+        </p:spPr>
+        <p:txBody>
+          <a:bodyPr wrap="none" lIns="35719" tIns="35719" rIns="35719" bIns="35719" anchor="ctr">
+            <a:spAutoFit/>
+          </a:bodyPr>
+          <a:lstStyle/>
+          <a:p>
+            <a:pPr>
+              <a:defRPr sz="3000">
+                <a:solidFill>
+                  <a:srgbClr val="FF7E79"/>
+                </a:solidFill>
+                <a:latin typeface="Noteworthy Light"/>
+                <a:ea typeface="Noteworthy Light"/>
+                <a:cs typeface="Noteworthy Light"/>
+                <a:sym typeface="Noteworthy Light"/>
+              </a:defRPr>
+            </a:pPr>
+            <a:r>
+              <a:rPr sz="2109"/>
+              <a:t>ℓ</a:t>
+            </a:r>
+            <a:r>
+              <a:rPr sz="2109" baseline="-5999"/>
+              <a:t>1</a:t>
+            </a:r>
+            <a:r>
+              <a:rPr sz="2109"/>
+              <a:t> penalty</a:t>
+            </a:r>
+          </a:p>
+        </p:txBody>
+      </p:sp>
+      <p:sp>
+        <p:nvSpPr>
+          <p:cNvPr id="283" name="ℓ2 penalty"/>
+          <p:cNvSpPr txBox="1"/>
+          <p:nvPr/>
+        </p:nvSpPr>
+        <p:spPr>
+          <a:xfrm>
+            <a:off x="750367" y="3611607"/>
+            <a:ext cx="1186223" cy="396712"/>
+          </a:xfrm>
+          <a:prstGeom prst="rect">
+            <a:avLst/>
+          </a:prstGeom>
+          <a:ln w="3175">
+            <a:miter lim="400000"/>
+          </a:ln>
+          <a:extLst>
+            <a:ext uri="{C572A759-6A51-4108-AA02-DFA0A04FC94B}">
+              <ma14:wrappingTextBoxFlag xmlns="" xmlns:m="http://schemas.openxmlformats.org/officeDocument/2006/math" xmlns:a14="http://schemas.microsoft.com/office/drawing/2010/main" xmlns:ma14="http://schemas.microsoft.com/office/mac/drawingml/2011/main" val="1"/>
+            </a:ext>
+          </a:extLst>
+        </p:spPr>
+        <p:txBody>
+          <a:bodyPr wrap="none" lIns="35719" tIns="35719" rIns="35719" bIns="35719" anchor="ctr">
+            <a:spAutoFit/>
+          </a:bodyPr>
+          <a:lstStyle/>
+          <a:p>
+            <a:pPr>
+              <a:defRPr sz="3000">
+                <a:solidFill>
+                  <a:srgbClr val="FF7E79"/>
+                </a:solidFill>
+                <a:latin typeface="Noteworthy Light"/>
+                <a:ea typeface="Noteworthy Light"/>
+                <a:cs typeface="Noteworthy Light"/>
+                <a:sym typeface="Noteworthy Light"/>
+              </a:defRPr>
+            </a:pPr>
+            <a:r>
+              <a:rPr sz="2109"/>
+              <a:t>ℓ</a:t>
+            </a:r>
+            <a:r>
+              <a:rPr sz="2109" baseline="-5999"/>
+              <a:t>2</a:t>
+            </a:r>
+            <a:r>
+              <a:rPr sz="2109"/>
+              <a:t> penalty</a:t>
+            </a:r>
+          </a:p>
+        </p:txBody>
+      </p:sp>
+      <p:pic>
+        <p:nvPicPr>
+          <p:cNvPr id="4" name="Line Line" descr="Line Line">
+            <a:extLst>
+              <a:ext uri="{FF2B5EF4-FFF2-40B4-BE49-F238E27FC236}">
+                <a16:creationId xmlns:a16="http://schemas.microsoft.com/office/drawing/2014/main" id="{8CA19CC4-1DF1-B29F-C692-48823B16B344}"/>
+              </a:ext>
+            </a:extLst>
+          </p:cNvPr>
+          <p:cNvPicPr>
+            <a:picLocks/>
+          </p:cNvPicPr>
+          <p:nvPr/>
+        </p:nvPicPr>
+        <p:blipFill>
+          <a:blip r:embed="rId3"/>
+          <a:stretch>
+            <a:fillRect/>
+          </a:stretch>
+        </p:blipFill>
+        <p:spPr>
+          <a:xfrm>
+            <a:off x="7835951" y="4990915"/>
+            <a:ext cx="1010290" cy="101029"/>
+          </a:xfrm>
+          <a:prstGeom prst="rect">
+            <a:avLst/>
+          </a:prstGeom>
+        </p:spPr>
+      </p:pic>
+      <mc:AlternateContent xmlns:mc="http://schemas.openxmlformats.org/markup-compatibility/2006">
+        <mc:Choice xmlns:a14="http://schemas.microsoft.com/office/drawing/2010/main" Requires="a14">
+          <p:sp>
+            <p:nvSpPr>
+              <p:cNvPr id="5" name="Constrains the model (pushes  s to be close to but NOT exactly equal to 0)">
+                <a:extLst>
+                  <a:ext uri="{FF2B5EF4-FFF2-40B4-BE49-F238E27FC236}">
+                    <a16:creationId xmlns:a16="http://schemas.microsoft.com/office/drawing/2014/main" id="{29A72916-10DE-D9D2-562F-007E4E434EE5}"/>
+                  </a:ext>
+                </a:extLst>
+              </p:cNvPr>
+              <p:cNvSpPr txBox="1"/>
+              <p:nvPr/>
+            </p:nvSpPr>
+            <p:spPr>
+              <a:xfrm>
+                <a:off x="7478163" y="5266764"/>
+                <a:ext cx="2960401" cy="764633"/>
+              </a:xfrm>
+              <a:prstGeom prst="rect">
+                <a:avLst/>
+              </a:prstGeom>
+              <a:ln w="3175">
+                <a:miter lim="400000"/>
+              </a:ln>
+              <a:extLst>
+                <a:ext uri="{C572A759-6A51-4108-AA02-DFA0A04FC94B}">
+                  <ma14:wrappingTextBoxFlag xmlns="" xmlns:m="http://schemas.openxmlformats.org/officeDocument/2006/math" xmlns:ma14="http://schemas.microsoft.com/office/mac/drawingml/2011/main" val="1"/>
+                </a:ext>
+              </a:extLst>
+            </p:spPr>
+            <p:txBody>
+              <a:bodyPr lIns="35719" tIns="35719" rIns="35719" bIns="35719" anchor="ctr">
+                <a:spAutoFit/>
+              </a:bodyPr>
+              <a:lstStyle/>
+              <a:p>
+                <a:pPr>
+                  <a:defRPr>
+                    <a:solidFill>
+                      <a:srgbClr val="005493"/>
+                    </a:solidFill>
+                    <a:latin typeface="Noteworthy Light"/>
+                    <a:ea typeface="Noteworthy Light"/>
+                    <a:cs typeface="Noteworthy Light"/>
+                    <a:sym typeface="Noteworthy Light"/>
+                  </a:defRPr>
+                </a:pPr>
+                <a:r>
+                  <a:rPr sz="1266"/>
+                  <a:t>Constrains the model</a:t>
+                </a:r>
+                <a:br>
+                  <a:rPr sz="1266"/>
+                </a:br>
+                <a:r>
+                  <a:rPr sz="1617"/>
+                  <a:t>(pushes </a:t>
+                </a:r>
+                <a14:m>
+                  <m:oMath xmlns:m="http://schemas.openxmlformats.org/officeDocument/2006/math">
+                    <m:r>
+                      <a:rPr sz="1617" i="1">
+                        <a:solidFill>
+                          <a:srgbClr val="005392"/>
+                        </a:solidFill>
+                        <a:latin typeface="Cambria Math" panose="02040503050406030204" pitchFamily="18" charset="0"/>
+                      </a:rPr>
+                      <m:t>𝛽</m:t>
+                    </m:r>
+                  </m:oMath>
+                </a14:m>
+                <a:r>
+                  <a:rPr sz="1617"/>
+                  <a:t>s to be close to but NOT exactly equal to 0)</a:t>
+                </a:r>
+              </a:p>
+            </p:txBody>
+          </p:sp>
+        </mc:Choice>
+        <mc:Fallback>
+          <p:sp>
+            <p:nvSpPr>
+              <p:cNvPr id="5" name="Constrains the model (pushes  s to be close to but NOT exactly equal to 0)">
+                <a:extLst>
+                  <a:ext uri="{FF2B5EF4-FFF2-40B4-BE49-F238E27FC236}">
+                    <a16:creationId xmlns:a16="http://schemas.microsoft.com/office/drawing/2014/main" id="{29A72916-10DE-D9D2-562F-007E4E434EE5}"/>
+                  </a:ext>
+                </a:extLst>
+              </p:cNvPr>
+              <p:cNvSpPr txBox="1">
+                <a:spLocks noRot="1" noChangeAspect="1" noMove="1" noResize="1" noEditPoints="1" noAdjustHandles="1" noChangeArrowheads="1" noChangeShapeType="1" noTextEdit="1"/>
+              </p:cNvSpPr>
+              <p:nvPr/>
+            </p:nvSpPr>
+            <p:spPr>
+              <a:xfrm>
+                <a:off x="7478163" y="5266764"/>
+                <a:ext cx="2960401" cy="764633"/>
+              </a:xfrm>
+              <a:prstGeom prst="rect">
+                <a:avLst/>
+              </a:prstGeom>
+              <a:blipFill>
+                <a:blip r:embed="rId4"/>
+                <a:stretch>
+                  <a:fillRect l="-3093" t="-800" r="-2268" b="-12000"/>
+                </a:stretch>
+              </a:blipFill>
+              <a:ln w="3175">
+                <a:miter lim="400000"/>
+              </a:ln>
+              <a:extLst>
+                <a:ext uri="{C572A759-6A51-4108-AA02-DFA0A04FC94B}">
+                  <ma14:wrappingTextBoxFlag xmlns="" xmlns:m="http://schemas.openxmlformats.org/officeDocument/2006/math" xmlns:ma14="http://schemas.microsoft.com/office/mac/drawingml/2011/main" xmlns:a14="http://schemas.microsoft.com/office/drawing/2010/main" val="1"/>
+                </a:ext>
+              </a:extLst>
+            </p:spPr>
+            <p:txBody>
+              <a:bodyPr/>
+              <a:lstStyle/>
+              <a:p>
+                <a:r>
+                  <a:rPr lang="en-US">
+                    <a:noFill/>
+                  </a:rPr>
+                  <a:t> </a:t>
+                </a:r>
+              </a:p>
+            </p:txBody>
+          </p:sp>
+        </mc:Fallback>
+      </mc:AlternateContent>
+    </p:spTree>
+  </p:cSld>
+  <p:clrMapOvr>
+    <a:masterClrMapping/>
+  </p:clrMapOvr>
+  <p:transition spd="med"/>
+  <p:timing>
+    <p:tnLst>
+      <p:par>
+        <p:cTn id="1" dur="indefinite" restart="never" nodeType="tmRoot">
+          <p:childTnLst>
+            <p:seq concurrent="1" nextAc="seek">
+              <p:cTn id="2" dur="indefinite" nodeType="mainSeq">
+                <p:childTnLst>
+                  <p:par>
+                    <p:cTn id="3" fill="hold">
+                      <p:stCondLst>
+                        <p:cond delay="indefinite"/>
+                      </p:stCondLst>
+                      <p:childTnLst>
+                        <p:par>
+                          <p:cTn id="4" fill="hold">
+                            <p:stCondLst>
+                              <p:cond delay="0"/>
+                            </p:stCondLst>
+                            <p:childTnLst>
+                              <p:par>
+                                <p:cTn id="5" presetID="1" presetClass="entr" presetSubtype="0" fill="hold" nodeType="clickEffect">
+                                  <p:stCondLst>
+                                    <p:cond delay="0"/>
+                                  </p:stCondLst>
+                                  <p:childTnLst>
+                                    <p:set>
+                                      <p:cBhvr>
+                                        <p:cTn id="6" dur="1" fill="hold">
+                                          <p:stCondLst>
+                                            <p:cond delay="0"/>
+                                          </p:stCondLst>
+                                        </p:cTn>
+                                        <p:tgtEl>
+                                          <p:spTgt spid="4"/>
+                                        </p:tgtEl>
+                                        <p:attrNameLst>
+                                          <p:attrName>style.visibility</p:attrName>
+                                        </p:attrNameLst>
+                                      </p:cBhvr>
+                                      <p:to>
+                                        <p:strVal val="visible"/>
+                                      </p:to>
+                                    </p:set>
+                                  </p:childTnLst>
+                                </p:cTn>
+                              </p:par>
+                              <p:par>
+                                <p:cTn id="7" presetID="1" presetClass="entr" presetSubtype="0" fill="hold" grpId="0" nodeType="withEffect">
+                                  <p:stCondLst>
+                                    <p:cond delay="0"/>
+                                  </p:stCondLst>
+                                  <p:childTnLst>
+                                    <p:set>
+                                      <p:cBhvr>
+                                        <p:cTn id="8" dur="1" fill="hold">
+                                          <p:stCondLst>
+                                            <p:cond delay="0"/>
+                                          </p:stCondLst>
+                                        </p:cTn>
+                                        <p:tgtEl>
+                                          <p:spTgt spid="5"/>
+                                        </p:tgtEl>
+                                        <p:attrNameLst>
+                                          <p:attrName>style.visibility</p:attrName>
+                                        </p:attrNameLst>
+                                      </p:cBhvr>
+                                      <p:to>
+                                        <p:strVal val="visible"/>
+                                      </p:to>
+                                    </p:set>
+                                  </p:childTnLst>
+                                </p:cTn>
+                              </p:par>
+                            </p:childTnLst>
+                          </p:cTn>
+                        </p:par>
+                      </p:childTnLst>
+                    </p:cTn>
+                  </p:par>
+                </p:childTnLst>
+              </p:cTn>
+              <p:prevCondLst>
+                <p:cond evt="onPrev" delay="0">
+                  <p:tgtEl>
+                    <p:sldTgt/>
+                  </p:tgtEl>
+                </p:cond>
+              </p:prevCondLst>
+              <p:nextCondLst>
+                <p:cond evt="onNext" delay="0">
+                  <p:tgtEl>
+                    <p:sldTgt/>
+                  </p:tgtEl>
+                </p:cond>
+              </p:nextCondLst>
+            </p:seq>
+          </p:childTnLst>
+        </p:cTn>
+      </p:par>
+    </p:tnLst>
+    <p:bldLst>
+      <p:bldP spid="5" grpId="0" animBg="1"/>
+    </p:bldLst>
+  </p:timing>
+</p:sld>
+</file>
+
+<file path=ppt/slides/slide11.xml><?xml version="1.0" encoding="utf-8"?>
+<p:sld xmlns:a="http://schemas.openxmlformats.org/drawingml/2006/main" xmlns:r="http://schemas.openxmlformats.org/officeDocument/2006/relationships" xmlns:p="http://schemas.openxmlformats.org/presentationml/2006/main">
+  <p:cSld>
+    <p:spTree>
+      <p:nvGrpSpPr>
         <p:cNvPr id="1" name="">
           <a:extLst>
             <a:ext uri="{FF2B5EF4-FFF2-40B4-BE49-F238E27FC236}">
@@ -5027,7 +6874,7 @@
 </p:sld>
 </file>
 
-<file path=ppt/slides/slide11.xml><?xml version="1.0" encoding="utf-8"?>
+<file path=ppt/slides/slide12.xml><?xml version="1.0" encoding="utf-8"?>
 <p:sld xmlns:a="http://schemas.openxmlformats.org/drawingml/2006/main" xmlns:r="http://schemas.openxmlformats.org/officeDocument/2006/relationships" xmlns:p="http://schemas.openxmlformats.org/presentationml/2006/main">
   <p:cSld>
     <p:spTree>
@@ -5391,7 +7238,7 @@
 </p:sld>
 </file>
 
-<file path=ppt/slides/slide12.xml><?xml version="1.0" encoding="utf-8"?>
+<file path=ppt/slides/slide13.xml><?xml version="1.0" encoding="utf-8"?>
 <p:sld xmlns:a="http://schemas.openxmlformats.org/drawingml/2006/main" xmlns:r="http://schemas.openxmlformats.org/officeDocument/2006/relationships" xmlns:p="http://schemas.openxmlformats.org/presentationml/2006/main">
   <p:cSld>
     <p:spTree>
@@ -5587,7 +7434,7 @@
 </p:sld>
 </file>
 
-<file path=ppt/slides/slide13.xml><?xml version="1.0" encoding="utf-8"?>
+<file path=ppt/slides/slide14.xml><?xml version="1.0" encoding="utf-8"?>
 <p:sld xmlns:a="http://schemas.openxmlformats.org/drawingml/2006/main" xmlns:r="http://schemas.openxmlformats.org/officeDocument/2006/relationships" xmlns:p="http://schemas.openxmlformats.org/presentationml/2006/main">
   <p:cSld>
     <p:spTree>
@@ -6846,152 +8693,6 @@
 </p:sld>
 </file>
 
-<file path=ppt/slides/slide14.xml><?xml version="1.0" encoding="utf-8"?>
-<p:sld xmlns:a="http://schemas.openxmlformats.org/drawingml/2006/main" xmlns:r="http://schemas.openxmlformats.org/officeDocument/2006/relationships" xmlns:p="http://schemas.openxmlformats.org/presentationml/2006/main">
-  <p:cSld>
-    <p:spTree>
-      <p:nvGrpSpPr>
-        <p:cNvPr id="1" name=""/>
-        <p:cNvGrpSpPr/>
-        <p:nvPr/>
-      </p:nvGrpSpPr>
-      <p:grpSpPr>
-        <a:xfrm>
-          <a:off x="0" y="0"/>
-          <a:ext cx="0" cy="0"/>
-          <a:chOff x="0" y="0"/>
-          <a:chExt cx="0" cy="0"/>
-        </a:xfrm>
-      </p:grpSpPr>
-      <p:sp>
-        <p:nvSpPr>
-          <p:cNvPr id="314" name="Regularization"/>
-          <p:cNvSpPr txBox="1">
-            <a:spLocks noGrp="1"/>
-          </p:cNvSpPr>
-          <p:nvPr>
-            <p:ph type="title"/>
-          </p:nvPr>
-        </p:nvSpPr>
-        <p:spPr>
-          <a:prstGeom prst="rect">
-            <a:avLst/>
-          </a:prstGeom>
-        </p:spPr>
-        <p:txBody>
-          <a:bodyPr/>
-          <a:lstStyle/>
-          <a:p>
-            <a:r>
-              <a:rPr lang="en-US"/>
-              <a:t>In Practice: Fitting Regularized Models</a:t>
-            </a:r>
-            <a:endParaRPr/>
-          </a:p>
-        </p:txBody>
-      </p:sp>
-      <p:sp>
-        <p:nvSpPr>
-          <p:cNvPr id="315" name="We’ve just looked at Lasso, Ridge, and Elastic net (explicit regularization) in the context of linear regression…"/>
-          <p:cNvSpPr txBox="1">
-            <a:spLocks noGrp="1"/>
-          </p:cNvSpPr>
-          <p:nvPr>
-            <p:ph type="body" idx="1"/>
-          </p:nvPr>
-        </p:nvSpPr>
-        <p:spPr>
-          <a:prstGeom prst="rect">
-            <a:avLst/>
-          </a:prstGeom>
-        </p:spPr>
-        <p:txBody>
-          <a:bodyPr>
-            <a:normAutofit/>
-          </a:bodyPr>
-          <a:lstStyle/>
-          <a:p>
-            <a:r>
-              <a:rPr lang="en-US" sz="1800" dirty="0"/>
-              <a:t>Python — scikit-learn</a:t>
-            </a:r>
-          </a:p>
-          <a:p>
-            <a:r>
-              <a:rPr lang="en-US" dirty="0" err="1"/>
-              <a:t>make_pipeline</a:t>
-            </a:r>
-            <a:r>
-              <a:rPr lang="en-US" dirty="0"/>
-              <a:t>(</a:t>
-            </a:r>
-            <a:r>
-              <a:rPr lang="en-US" dirty="0" err="1"/>
-              <a:t>StandardScaler</a:t>
-            </a:r>
-            <a:r>
-              <a:rPr lang="en-US" dirty="0"/>
-              <a:t>(), </a:t>
-            </a:r>
-            <a:r>
-              <a:rPr lang="en-US" dirty="0" err="1"/>
-              <a:t>LassoCV</a:t>
-            </a:r>
-            <a:r>
-              <a:rPr lang="en-US" dirty="0"/>
-              <a:t>(cv=10)).fit(X, y)</a:t>
-            </a:r>
-          </a:p>
-          <a:p>
-            <a:r>
-              <a:rPr lang="en-US" sz="1800" dirty="0"/>
-              <a:t>R — </a:t>
-            </a:r>
-            <a:r>
-              <a:rPr lang="en-US" sz="1800" dirty="0" err="1"/>
-              <a:t>glmnet</a:t>
-            </a:r>
-            <a:endParaRPr lang="en-US" sz="1800" dirty="0"/>
-          </a:p>
-          <a:p>
-            <a:r>
-              <a:rPr lang="en-US" dirty="0" err="1"/>
-              <a:t>cv.glmnet</a:t>
-            </a:r>
-            <a:r>
-              <a:rPr lang="en-US" dirty="0"/>
-              <a:t>(X, y, alpha = 1)</a:t>
-            </a:r>
-          </a:p>
-          <a:p>
-            <a:r>
-              <a:rPr lang="en-US" sz="1800" dirty="0"/>
-              <a:t>alpha: 1 = Lasso, 0 = Ridge, between = Elastic Net</a:t>
-            </a:r>
-          </a:p>
-          <a:p>
-            <a:r>
-              <a:rPr lang="en-US" sz="1800" dirty="0"/>
-              <a:t>Penalty-weight conventions differ between packages</a:t>
-            </a:r>
-            <a:endParaRPr dirty="0"/>
-          </a:p>
-        </p:txBody>
-      </p:sp>
-    </p:spTree>
-    <p:extLst>
-      <p:ext uri="{BB962C8B-B14F-4D97-AF65-F5344CB8AC3E}">
-        <p14:creationId xmlns:p14="http://schemas.microsoft.com/office/powerpoint/2010/main" val="450852903"/>
-      </p:ext>
-    </p:extLst>
-  </p:cSld>
-  <p:clrMapOvr>
-    <a:masterClrMapping/>
-  </p:clrMapOvr>
-  <p:transition spd="med"/>
-</p:sld>
-</file>
-
 <file path=ppt/slides/slide15.xml><?xml version="1.0" encoding="utf-8"?>
 <p:sld xmlns:a="http://schemas.openxmlformats.org/drawingml/2006/main" xmlns:r="http://schemas.openxmlformats.org/officeDocument/2006/relationships" xmlns:p="http://schemas.openxmlformats.org/presentationml/2006/main">
   <p:cSld>
@@ -7029,15 +8730,10 @@
           <a:lstStyle/>
           <a:p>
             <a:r>
-              <a:t>Regularization</a:t>
-            </a:r>
-            <a:r>
               <a:rPr lang="en-US"/>
-              <a:t> Generally</a:t>
-            </a:r>
-            <a:r>
-              <a:t> </a:t>
-            </a:r>
+              <a:t>In Practice: Fitting Regularized Models</a:t>
+            </a:r>
+            <a:endParaRPr/>
           </a:p>
         </p:txBody>
       </p:sp>
@@ -7057,39 +8753,82 @@
           </a:prstGeom>
         </p:spPr>
         <p:txBody>
-          <a:bodyPr/>
+          <a:bodyPr>
+            <a:normAutofit/>
+          </a:bodyPr>
           <a:lstStyle/>
           <a:p>
             <a:r>
-              <a:rPr lang="en-US"/>
-              <a:t>Regularization is a general idea, not a linear-regression trick</a:t>
-            </a:r>
-          </a:p>
-          <a:p>
-            <a:r>
-              <a:rPr lang="en-US"/>
-              <a:t>Used in logistic regression, neural networks, decision trees, and more</a:t>
-            </a:r>
-          </a:p>
-          <a:p>
-            <a:r>
-              <a:rPr lang="en-US"/>
-              <a:t>Implicit forms need no penalty term: early stopping, dropout, pruning</a:t>
-            </a:r>
-          </a:p>
-          <a:p>
-            <a:r>
-              <a:rPr lang="en-US"/>
-              <a:t>Applies to weights, complexity, or the training process itself</a:t>
-            </a:r>
-            <a:endParaRPr/>
+              <a:rPr lang="en-US" sz="1800" dirty="0"/>
+              <a:t>Python — scikit-learn</a:t>
+            </a:r>
+          </a:p>
+          <a:p>
+            <a:r>
+              <a:rPr lang="en-US" dirty="0" err="1"/>
+              <a:t>make_pipeline</a:t>
+            </a:r>
+            <a:r>
+              <a:rPr lang="en-US" dirty="0"/>
+              <a:t>(</a:t>
+            </a:r>
+            <a:r>
+              <a:rPr lang="en-US" dirty="0" err="1"/>
+              <a:t>StandardScaler</a:t>
+            </a:r>
+            <a:r>
+              <a:rPr lang="en-US" dirty="0"/>
+              <a:t>(), </a:t>
+            </a:r>
+            <a:r>
+              <a:rPr lang="en-US" dirty="0" err="1"/>
+              <a:t>LassoCV</a:t>
+            </a:r>
+            <a:r>
+              <a:rPr lang="en-US" dirty="0"/>
+              <a:t>(cv=10)).fit(X, y)</a:t>
+            </a:r>
+          </a:p>
+          <a:p>
+            <a:r>
+              <a:rPr lang="en-US" sz="1800" dirty="0"/>
+              <a:t>R — </a:t>
+            </a:r>
+            <a:r>
+              <a:rPr lang="en-US" sz="1800" dirty="0" err="1"/>
+              <a:t>glmnet</a:t>
+            </a:r>
+            <a:endParaRPr lang="en-US" sz="1800" dirty="0"/>
+          </a:p>
+          <a:p>
+            <a:r>
+              <a:rPr lang="en-US" dirty="0" err="1"/>
+              <a:t>cv.glmnet</a:t>
+            </a:r>
+            <a:r>
+              <a:rPr lang="en-US" dirty="0"/>
+              <a:t>(X, y, alpha = 1)</a:t>
+            </a:r>
+          </a:p>
+          <a:p>
+            <a:r>
+              <a:rPr lang="en-US" sz="1800" dirty="0"/>
+              <a:t>alpha: 1 = Lasso, 0 = Ridge, between = Elastic Net</a:t>
+            </a:r>
+          </a:p>
+          <a:p>
+            <a:r>
+              <a:rPr lang="en-US" sz="1800" dirty="0"/>
+              <a:t>Penalty-weight conventions differ between packages</a:t>
+            </a:r>
+            <a:endParaRPr dirty="0"/>
           </a:p>
         </p:txBody>
       </p:sp>
     </p:spTree>
     <p:extLst>
       <p:ext uri="{BB962C8B-B14F-4D97-AF65-F5344CB8AC3E}">
-        <p14:creationId xmlns:p14="http://schemas.microsoft.com/office/powerpoint/2010/main" val="178340659"/>
+        <p14:creationId xmlns:p14="http://schemas.microsoft.com/office/powerpoint/2010/main" val="450852903"/>
       </p:ext>
     </p:extLst>
   </p:cSld>
@@ -7137,10 +8876,15 @@
           <a:lstStyle/>
           <a:p>
             <a:r>
+              <a:t>Regularization</a:t>
+            </a:r>
+            <a:r>
               <a:rPr lang="en-US"/>
-              <a:t>Regularized Models in scikit-learn</a:t>
-            </a:r>
-            <a:endParaRPr/>
+              <a:t> Generally</a:t>
+            </a:r>
+            <a:r>
+              <a:t> </a:t>
+            </a:r>
           </a:p>
         </p:txBody>
       </p:sp>
@@ -7164,6 +8908,109 @@
           <a:lstStyle/>
           <a:p>
             <a:r>
+              <a:rPr lang="en-US"/>
+              <a:t>Regularization is a general idea, not a linear-regression trick</a:t>
+            </a:r>
+          </a:p>
+          <a:p>
+            <a:r>
+              <a:rPr lang="en-US"/>
+              <a:t>Used in logistic regression, neural networks, decision trees, and more</a:t>
+            </a:r>
+          </a:p>
+          <a:p>
+            <a:r>
+              <a:rPr lang="en-US"/>
+              <a:t>Implicit forms need no penalty term: early stopping, dropout, pruning</a:t>
+            </a:r>
+          </a:p>
+          <a:p>
+            <a:r>
+              <a:rPr lang="en-US"/>
+              <a:t>Applies to weights, complexity, or the training process itself</a:t>
+            </a:r>
+            <a:endParaRPr/>
+          </a:p>
+        </p:txBody>
+      </p:sp>
+    </p:spTree>
+    <p:extLst>
+      <p:ext uri="{BB962C8B-B14F-4D97-AF65-F5344CB8AC3E}">
+        <p14:creationId xmlns:p14="http://schemas.microsoft.com/office/powerpoint/2010/main" val="178340659"/>
+      </p:ext>
+    </p:extLst>
+  </p:cSld>
+  <p:clrMapOvr>
+    <a:masterClrMapping/>
+  </p:clrMapOvr>
+  <p:transition spd="med"/>
+</p:sld>
+</file>
+
+<file path=ppt/slides/slide17.xml><?xml version="1.0" encoding="utf-8"?>
+<p:sld xmlns:a="http://schemas.openxmlformats.org/drawingml/2006/main" xmlns:r="http://schemas.openxmlformats.org/officeDocument/2006/relationships" xmlns:p="http://schemas.openxmlformats.org/presentationml/2006/main">
+  <p:cSld>
+    <p:spTree>
+      <p:nvGrpSpPr>
+        <p:cNvPr id="1" name=""/>
+        <p:cNvGrpSpPr/>
+        <p:nvPr/>
+      </p:nvGrpSpPr>
+      <p:grpSpPr>
+        <a:xfrm>
+          <a:off x="0" y="0"/>
+          <a:ext cx="0" cy="0"/>
+          <a:chOff x="0" y="0"/>
+          <a:chExt cx="0" cy="0"/>
+        </a:xfrm>
+      </p:grpSpPr>
+      <p:sp>
+        <p:nvSpPr>
+          <p:cNvPr id="314" name="Regularization"/>
+          <p:cNvSpPr txBox="1">
+            <a:spLocks noGrp="1"/>
+          </p:cNvSpPr>
+          <p:nvPr>
+            <p:ph type="title"/>
+          </p:nvPr>
+        </p:nvSpPr>
+        <p:spPr>
+          <a:prstGeom prst="rect">
+            <a:avLst/>
+          </a:prstGeom>
+        </p:spPr>
+        <p:txBody>
+          <a:bodyPr/>
+          <a:lstStyle/>
+          <a:p>
+            <a:r>
+              <a:rPr lang="en-US"/>
+              <a:t>Regularized Models in scikit-learn</a:t>
+            </a:r>
+            <a:endParaRPr/>
+          </a:p>
+        </p:txBody>
+      </p:sp>
+      <p:sp>
+        <p:nvSpPr>
+          <p:cNvPr id="315" name="We’ve just looked at Lasso, Ridge, and Elastic net (explicit regularization) in the context of linear regression…"/>
+          <p:cNvSpPr txBox="1">
+            <a:spLocks noGrp="1"/>
+          </p:cNvSpPr>
+          <p:nvPr>
+            <p:ph type="body" idx="1"/>
+          </p:nvPr>
+        </p:nvSpPr>
+        <p:spPr>
+          <a:prstGeom prst="rect">
+            <a:avLst/>
+          </a:prstGeom>
+        </p:spPr>
+        <p:txBody>
+          <a:bodyPr/>
+          <a:lstStyle/>
+          <a:p>
+            <a:r>
               <a:rPr lang="en-US" dirty="0"/>
               <a:t>By default: LogisticRegression, SVC</a:t>
             </a:r>
@@ -7217,7 +9064,7 @@
 </p:sld>
 </file>
 
-<file path=ppt/slides/slide17.xml><?xml version="1.0" encoding="utf-8"?>
+<file path=ppt/slides/slide18.xml><?xml version="1.0" encoding="utf-8"?>
 <p:sld xmlns:a="http://schemas.openxmlformats.org/drawingml/2006/main" xmlns:r="http://schemas.openxmlformats.org/officeDocument/2006/relationships" xmlns:p="http://schemas.openxmlformats.org/presentationml/2006/main">
   <p:cSld>
     <p:spTree>
@@ -9746,7 +11593,7 @@
               </a:ln>
               <a:extLst>
                 <a:ext uri="{C572A759-6A51-4108-AA02-DFA0A04FC94B}">
-                  <ma14:wrappingTextBoxFlag xmlns:ma14="http://schemas.microsoft.com/office/mac/drawingml/2011/main" xmlns:m="http://schemas.openxmlformats.org/officeDocument/2006/math" xmlns="" val="1"/>
+                  <ma14:wrappingTextBoxFlag xmlns="" xmlns:m="http://schemas.openxmlformats.org/officeDocument/2006/math" xmlns:ma14="http://schemas.microsoft.com/office/mac/drawingml/2011/main" val="1"/>
                 </a:ext>
               </a:extLst>
             </p:spPr>
@@ -9827,7 +11674,7 @@
               </a:ln>
               <a:extLst>
                 <a:ext uri="{C572A759-6A51-4108-AA02-DFA0A04FC94B}">
-                  <ma14:wrappingTextBoxFlag xmlns:a14="http://schemas.microsoft.com/office/drawing/2010/main" xmlns:ma14="http://schemas.microsoft.com/office/mac/drawingml/2011/main" xmlns:m="http://schemas.openxmlformats.org/officeDocument/2006/math" xmlns="" val="1"/>
+                  <ma14:wrappingTextBoxFlag xmlns="" xmlns:m="http://schemas.openxmlformats.org/officeDocument/2006/math" xmlns:ma14="http://schemas.microsoft.com/office/mac/drawingml/2011/main" xmlns:a14="http://schemas.microsoft.com/office/drawing/2010/main" val="1"/>
                 </a:ext>
               </a:extLst>
             </p:spPr>
@@ -9939,7 +11786,7 @@
               </a:ln>
               <a:extLst>
                 <a:ext uri="{C572A759-6A51-4108-AA02-DFA0A04FC94B}">
-                  <ma14:wrappingTextBoxFlag xmlns:ma14="http://schemas.microsoft.com/office/mac/drawingml/2011/main" xmlns:m="http://schemas.openxmlformats.org/officeDocument/2006/math" xmlns="" val="1"/>
+                  <ma14:wrappingTextBoxFlag xmlns="" xmlns:m="http://schemas.openxmlformats.org/officeDocument/2006/math" xmlns:ma14="http://schemas.microsoft.com/office/mac/drawingml/2011/main" val="1"/>
                 </a:ext>
               </a:extLst>
             </p:spPr>
@@ -10020,7 +11867,7 @@
               </a:ln>
               <a:extLst>
                 <a:ext uri="{C572A759-6A51-4108-AA02-DFA0A04FC94B}">
-                  <ma14:wrappingTextBoxFlag xmlns:a14="http://schemas.microsoft.com/office/drawing/2010/main" xmlns:ma14="http://schemas.microsoft.com/office/mac/drawingml/2011/main" xmlns:m="http://schemas.openxmlformats.org/officeDocument/2006/math" xmlns="" val="1"/>
+                  <ma14:wrappingTextBoxFlag xmlns="" xmlns:m="http://schemas.openxmlformats.org/officeDocument/2006/math" xmlns:ma14="http://schemas.microsoft.com/office/mac/drawingml/2011/main" xmlns:a14="http://schemas.microsoft.com/office/drawing/2010/main" val="1"/>
                 </a:ext>
               </a:extLst>
             </p:spPr>
@@ -10058,7 +11905,7 @@
           </a:ln>
           <a:extLst>
             <a:ext uri="{C572A759-6A51-4108-AA02-DFA0A04FC94B}">
-              <ma14:wrappingTextBoxFlag xmlns:ma14="http://schemas.microsoft.com/office/mac/drawingml/2011/main" xmlns:a14="http://schemas.microsoft.com/office/drawing/2010/main" xmlns:m="http://schemas.openxmlformats.org/officeDocument/2006/math" xmlns="" val="1"/>
+              <ma14:wrappingTextBoxFlag xmlns="" xmlns:m="http://schemas.openxmlformats.org/officeDocument/2006/math" xmlns:a14="http://schemas.microsoft.com/office/drawing/2010/main" xmlns:ma14="http://schemas.microsoft.com/office/mac/drawingml/2011/main" val="1"/>
             </a:ext>
           </a:extLst>
         </p:spPr>
@@ -10132,7 +11979,7 @@
               </a:ln>
               <a:extLst>
                 <a:ext uri="{C572A759-6A51-4108-AA02-DFA0A04FC94B}">
-                  <ma14:wrappingTextBoxFlag xmlns:ma14="http://schemas.microsoft.com/office/mac/drawingml/2011/main" xmlns:m="http://schemas.openxmlformats.org/officeDocument/2006/math" xmlns="" val="1"/>
+                  <ma14:wrappingTextBoxFlag xmlns="" xmlns:m="http://schemas.openxmlformats.org/officeDocument/2006/math" xmlns:ma14="http://schemas.microsoft.com/office/mac/drawingml/2011/main" val="1"/>
                 </a:ext>
               </a:extLst>
             </p:spPr>
@@ -10241,7 +12088,7 @@
               </a:ln>
               <a:extLst>
                 <a:ext uri="{C572A759-6A51-4108-AA02-DFA0A04FC94B}">
-                  <ma14:wrappingTextBoxFlag xmlns:a14="http://schemas.microsoft.com/office/drawing/2010/main" xmlns:ma14="http://schemas.microsoft.com/office/mac/drawingml/2011/main" xmlns:m="http://schemas.openxmlformats.org/officeDocument/2006/math" xmlns="" val="1"/>
+                  <ma14:wrappingTextBoxFlag xmlns="" xmlns:m="http://schemas.openxmlformats.org/officeDocument/2006/math" xmlns:ma14="http://schemas.microsoft.com/office/mac/drawingml/2011/main" xmlns:a14="http://schemas.microsoft.com/office/drawing/2010/main" val="1"/>
                 </a:ext>
               </a:extLst>
             </p:spPr>
@@ -10699,1483 +12546,31 @@
       </p:grpSpPr>
       <p:sp>
         <p:nvSpPr>
-          <p:cNvPr id="280" name="Regularized Cost Functions"/>
-          <p:cNvSpPr txBox="1">
+          <p:cNvPr id="2" name="Title 1"/>
+          <p:cNvSpPr>
             <a:spLocks noGrp="1"/>
           </p:cNvSpPr>
           <p:nvPr>
             <p:ph type="title"/>
           </p:nvPr>
         </p:nvSpPr>
-        <p:spPr>
-          <a:xfrm>
-            <a:off x="750367" y="826603"/>
-            <a:ext cx="10691265" cy="1307592"/>
-          </a:xfrm>
-          <a:prstGeom prst="rect">
-            <a:avLst/>
-          </a:prstGeom>
-        </p:spPr>
+        <p:spPr/>
         <p:txBody>
           <a:bodyPr/>
           <a:lstStyle/>
           <a:p>
             <a:r>
-              <a:rPr lang="en-US"/>
-              <a:t>ℓ1 vs ℓ2 Penalties</a:t>
-            </a:r>
-            <a:endParaRPr/>
-          </a:p>
-        </p:txBody>
-      </p:sp>
-      <mc:AlternateContent xmlns:mc="http://schemas.openxmlformats.org/markup-compatibility/2006">
-        <mc:Choice xmlns:a14="http://schemas.microsoft.com/office/drawing/2010/main" Requires="a14">
-          <p:sp>
-            <p:nvSpPr>
-              <p:cNvPr id="281" name="Lasso linear regression cost function    (where  )…"/>
-              <p:cNvSpPr txBox="1">
-                <a:spLocks noGrp="1"/>
-              </p:cNvSpPr>
-              <p:nvPr>
-                <p:ph type="body" idx="1"/>
-              </p:nvPr>
-            </p:nvSpPr>
-            <p:spPr>
-              <a:xfrm>
-                <a:off x="2015133" y="2134195"/>
-                <a:ext cx="9762339" cy="4232672"/>
-              </a:xfrm>
-              <a:prstGeom prst="rect">
-                <a:avLst/>
-              </a:prstGeom>
-            </p:spPr>
-            <p:txBody>
-              <a:bodyPr/>
-              <a:lstStyle/>
-              <a:p>
-                <a:r>
-                  <a:rPr b="1" u="sng">
-                    <a:latin typeface="Graphik"/>
-                    <a:ea typeface="Graphik"/>
-                    <a:cs typeface="Graphik"/>
-                    <a:sym typeface="Graphik"/>
-                  </a:rPr>
-                  <a:t>Lasso</a:t>
-                </a:r>
-                <a:r>
-                  <a:t> linear regression cost function </a:t>
-                </a:r>
-                <a:br>
-                  <a:rPr/>
-                </a:br>
-                <a14:m>
-                  <m:oMath xmlns:m="http://schemas.openxmlformats.org/officeDocument/2006/math">
-                    <m:sSub>
-                      <m:sSubPr>
-                        <m:ctrlPr>
-                          <a:rPr sz="2391" i="1">
-                            <a:solidFill>
-                              <a:srgbClr val="52575F"/>
-                            </a:solidFill>
-                            <a:latin typeface="Cambria Math" panose="02040503050406030204" pitchFamily="18" charset="0"/>
-                          </a:rPr>
-                        </m:ctrlPr>
-                      </m:sSubPr>
-                      <m:e>
-                        <m:r>
-                          <a:rPr sz="2391" i="1">
-                            <a:solidFill>
-                              <a:srgbClr val="52575F"/>
-                            </a:solidFill>
-                            <a:latin typeface="Cambria Math" panose="02040503050406030204" pitchFamily="18" charset="0"/>
-                          </a:rPr>
-                          <m:t>𝐽</m:t>
-                        </m:r>
-                      </m:e>
-                      <m:sub>
-                        <m:r>
-                          <a:rPr sz="2391" i="1">
-                            <a:solidFill>
-                              <a:srgbClr val="52575F"/>
-                            </a:solidFill>
-                            <a:latin typeface="Cambria Math" panose="02040503050406030204" pitchFamily="18" charset="0"/>
-                          </a:rPr>
-                          <m:t>𝑙𝑎𝑠𝑠𝑜</m:t>
-                        </m:r>
-                      </m:sub>
-                    </m:sSub>
-                    <m:r>
-                      <a:rPr sz="2391" i="1">
-                        <a:solidFill>
-                          <a:srgbClr val="52575F"/>
-                        </a:solidFill>
-                        <a:latin typeface="Cambria Math" panose="02040503050406030204" pitchFamily="18" charset="0"/>
-                      </a:rPr>
-                      <m:t>(</m:t>
-                    </m:r>
-                    <m:r>
-                      <a:rPr sz="2391" i="1">
-                        <a:solidFill>
-                          <a:srgbClr val="52575F"/>
-                        </a:solidFill>
-                        <a:latin typeface="Cambria Math" panose="02040503050406030204" pitchFamily="18" charset="0"/>
-                      </a:rPr>
-                      <m:t>𝛽</m:t>
-                    </m:r>
-                    <m:r>
-                      <a:rPr sz="2391" i="1">
-                        <a:solidFill>
-                          <a:srgbClr val="52575F"/>
-                        </a:solidFill>
-                        <a:latin typeface="Cambria Math" panose="02040503050406030204" pitchFamily="18" charset="0"/>
-                      </a:rPr>
-                      <m:t>)=</m:t>
-                    </m:r>
-                    <m:f>
-                      <m:fPr>
-                        <m:ctrlPr>
-                          <a:rPr sz="2391" i="1">
-                            <a:solidFill>
-                              <a:srgbClr val="52575F"/>
-                            </a:solidFill>
-                            <a:latin typeface="Cambria Math" panose="02040503050406030204" pitchFamily="18" charset="0"/>
-                          </a:rPr>
-                        </m:ctrlPr>
-                      </m:fPr>
-                      <m:num>
-                        <m:r>
-                          <a:rPr sz="2391" i="1">
-                            <a:solidFill>
-                              <a:srgbClr val="52575F"/>
-                            </a:solidFill>
-                            <a:latin typeface="Cambria Math" panose="02040503050406030204" pitchFamily="18" charset="0"/>
-                          </a:rPr>
-                          <m:t>1</m:t>
-                        </m:r>
-                      </m:num>
-                      <m:den>
-                        <m:r>
-                          <a:rPr sz="2391" i="1">
-                            <a:solidFill>
-                              <a:srgbClr val="52575F"/>
-                            </a:solidFill>
-                            <a:latin typeface="Cambria Math" panose="02040503050406030204" pitchFamily="18" charset="0"/>
-                          </a:rPr>
-                          <m:t>𝑛</m:t>
-                        </m:r>
-                      </m:den>
-                    </m:f>
-                    <m:limUpp>
-                      <m:limUppPr>
-                        <m:ctrlPr>
-                          <a:rPr sz="2391" i="1">
-                            <a:solidFill>
-                              <a:srgbClr val="52575F"/>
-                            </a:solidFill>
-                            <a:latin typeface="Cambria Math" panose="02040503050406030204" pitchFamily="18" charset="0"/>
-                          </a:rPr>
-                        </m:ctrlPr>
-                      </m:limUppPr>
-                      <m:e>
-                        <m:limLow>
-                          <m:limLowPr>
-                            <m:ctrlPr>
-                              <a:rPr sz="2391" i="1">
-                                <a:solidFill>
-                                  <a:srgbClr val="52575F"/>
-                                </a:solidFill>
-                                <a:latin typeface="Cambria Math" panose="02040503050406030204" pitchFamily="18" charset="0"/>
-                              </a:rPr>
-                            </m:ctrlPr>
-                          </m:limLowPr>
-                          <m:e>
-                            <m:r>
-                              <a:rPr sz="2391" i="1">
-                                <a:solidFill>
-                                  <a:srgbClr val="52575F"/>
-                                </a:solidFill>
-                                <a:latin typeface="Cambria Math" panose="02040503050406030204" pitchFamily="18" charset="0"/>
-                              </a:rPr>
-                              <m:t>∑</m:t>
-                            </m:r>
-                          </m:e>
-                          <m:lim>
-                            <m:r>
-                              <a:rPr sz="2391" i="1">
-                                <a:solidFill>
-                                  <a:srgbClr val="52575F"/>
-                                </a:solidFill>
-                                <a:latin typeface="Cambria Math" panose="02040503050406030204" pitchFamily="18" charset="0"/>
-                              </a:rPr>
-                              <m:t>𝑖</m:t>
-                            </m:r>
-                            <m:r>
-                              <a:rPr sz="2391" i="1">
-                                <a:solidFill>
-                                  <a:srgbClr val="52575F"/>
-                                </a:solidFill>
-                                <a:latin typeface="Cambria Math" panose="02040503050406030204" pitchFamily="18" charset="0"/>
-                              </a:rPr>
-                              <m:t>=1</m:t>
-                            </m:r>
-                          </m:lim>
-                        </m:limLow>
-                      </m:e>
-                      <m:lim>
-                        <m:r>
-                          <a:rPr sz="2391" i="1">
-                            <a:solidFill>
-                              <a:srgbClr val="52575F"/>
-                            </a:solidFill>
-                            <a:latin typeface="Cambria Math" panose="02040503050406030204" pitchFamily="18" charset="0"/>
-                          </a:rPr>
-                          <m:t>𝑛</m:t>
-                        </m:r>
-                      </m:lim>
-                    </m:limUpp>
-                    <m:sSup>
-                      <m:sSupPr>
-                        <m:ctrlPr>
-                          <a:rPr sz="2391" i="1">
-                            <a:solidFill>
-                              <a:srgbClr val="52575F"/>
-                            </a:solidFill>
-                            <a:latin typeface="Cambria Math" panose="02040503050406030204" pitchFamily="18" charset="0"/>
-                          </a:rPr>
-                        </m:ctrlPr>
-                      </m:sSupPr>
-                      <m:e>
-                        <m:d>
-                          <m:dPr>
-                            <m:ctrlPr>
-                              <a:rPr sz="2391" i="1">
-                                <a:solidFill>
-                                  <a:srgbClr val="52575F"/>
-                                </a:solidFill>
-                                <a:latin typeface="Cambria Math" panose="02040503050406030204" pitchFamily="18" charset="0"/>
-                              </a:rPr>
-                            </m:ctrlPr>
-                          </m:dPr>
-                          <m:e>
-                            <m:sSub>
-                              <m:sSubPr>
-                                <m:ctrlPr>
-                                  <a:rPr sz="2391" i="1">
-                                    <a:solidFill>
-                                      <a:srgbClr val="52575F"/>
-                                    </a:solidFill>
-                                    <a:latin typeface="Cambria Math" panose="02040503050406030204" pitchFamily="18" charset="0"/>
-                                  </a:rPr>
-                                </m:ctrlPr>
-                              </m:sSubPr>
-                              <m:e>
-                                <m:r>
-                                  <a:rPr sz="2391" i="1">
-                                    <a:solidFill>
-                                      <a:srgbClr val="52575F"/>
-                                    </a:solidFill>
-                                    <a:latin typeface="Cambria Math" panose="02040503050406030204" pitchFamily="18" charset="0"/>
-                                  </a:rPr>
-                                  <m:t>𝑦</m:t>
-                                </m:r>
-                              </m:e>
-                              <m:sub>
-                                <m:r>
-                                  <a:rPr sz="2391" i="1">
-                                    <a:solidFill>
-                                      <a:srgbClr val="52575F"/>
-                                    </a:solidFill>
-                                    <a:latin typeface="Cambria Math" panose="02040503050406030204" pitchFamily="18" charset="0"/>
-                                  </a:rPr>
-                                  <m:t>𝑖</m:t>
-                                </m:r>
-                              </m:sub>
-                            </m:sSub>
-                            <m:r>
-                              <a:rPr sz="2391" i="1">
-                                <a:solidFill>
-                                  <a:srgbClr val="52575F"/>
-                                </a:solidFill>
-                                <a:latin typeface="Cambria Math" panose="02040503050406030204" pitchFamily="18" charset="0"/>
-                              </a:rPr>
-                              <m:t>−</m:t>
-                            </m:r>
-                            <m:sSub>
-                              <m:sSubPr>
-                                <m:ctrlPr>
-                                  <a:rPr sz="2391" i="1">
-                                    <a:solidFill>
-                                      <a:srgbClr val="52575F"/>
-                                    </a:solidFill>
-                                    <a:latin typeface="Cambria Math" panose="02040503050406030204" pitchFamily="18" charset="0"/>
-                                  </a:rPr>
-                                </m:ctrlPr>
-                              </m:sSubPr>
-                              <m:e>
-                                <m:r>
-                                  <a:rPr sz="2391" i="1">
-                                    <a:solidFill>
-                                      <a:srgbClr val="52575F"/>
-                                    </a:solidFill>
-                                    <a:latin typeface="Cambria Math" panose="02040503050406030204" pitchFamily="18" charset="0"/>
-                                  </a:rPr>
-                                  <m:t>𝛽</m:t>
-                                </m:r>
-                              </m:e>
-                              <m:sub>
-                                <m:r>
-                                  <a:rPr sz="2391" i="1">
-                                    <a:solidFill>
-                                      <a:srgbClr val="52575F"/>
-                                    </a:solidFill>
-                                    <a:latin typeface="Cambria Math" panose="02040503050406030204" pitchFamily="18" charset="0"/>
-                                  </a:rPr>
-                                  <m:t>0</m:t>
-                                </m:r>
-                              </m:sub>
-                            </m:sSub>
-                            <m:r>
-                              <a:rPr sz="2391" i="1">
-                                <a:solidFill>
-                                  <a:srgbClr val="52575F"/>
-                                </a:solidFill>
-                                <a:latin typeface="Cambria Math" panose="02040503050406030204" pitchFamily="18" charset="0"/>
-                              </a:rPr>
-                              <m:t>−</m:t>
-                            </m:r>
-                            <m:limUpp>
-                              <m:limUppPr>
-                                <m:ctrlPr>
-                                  <a:rPr sz="2391" i="1">
-                                    <a:solidFill>
-                                      <a:srgbClr val="52575F"/>
-                                    </a:solidFill>
-                                    <a:latin typeface="Cambria Math" panose="02040503050406030204" pitchFamily="18" charset="0"/>
-                                  </a:rPr>
-                                </m:ctrlPr>
-                              </m:limUppPr>
-                              <m:e>
-                                <m:limLow>
-                                  <m:limLowPr>
-                                    <m:ctrlPr>
-                                      <a:rPr sz="2391" i="1">
-                                        <a:solidFill>
-                                          <a:srgbClr val="52575F"/>
-                                        </a:solidFill>
-                                        <a:latin typeface="Cambria Math" panose="02040503050406030204" pitchFamily="18" charset="0"/>
-                                      </a:rPr>
-                                    </m:ctrlPr>
-                                  </m:limLowPr>
-                                  <m:e>
-                                    <m:r>
-                                      <a:rPr sz="2391" i="1">
-                                        <a:solidFill>
-                                          <a:srgbClr val="52575F"/>
-                                        </a:solidFill>
-                                        <a:latin typeface="Cambria Math" panose="02040503050406030204" pitchFamily="18" charset="0"/>
-                                      </a:rPr>
-                                      <m:t>∑</m:t>
-                                    </m:r>
-                                  </m:e>
-                                  <m:lim>
-                                    <m:r>
-                                      <a:rPr sz="2391" i="1">
-                                        <a:solidFill>
-                                          <a:srgbClr val="52575F"/>
-                                        </a:solidFill>
-                                        <a:latin typeface="Cambria Math" panose="02040503050406030204" pitchFamily="18" charset="0"/>
-                                      </a:rPr>
-                                      <m:t>𝑗</m:t>
-                                    </m:r>
-                                    <m:r>
-                                      <a:rPr sz="2391" i="1">
-                                        <a:solidFill>
-                                          <a:srgbClr val="52575F"/>
-                                        </a:solidFill>
-                                        <a:latin typeface="Cambria Math" panose="02040503050406030204" pitchFamily="18" charset="0"/>
-                                      </a:rPr>
-                                      <m:t>=1</m:t>
-                                    </m:r>
-                                  </m:lim>
-                                </m:limLow>
-                              </m:e>
-                              <m:lim>
-                                <m:r>
-                                  <a:rPr sz="2391" i="1">
-                                    <a:solidFill>
-                                      <a:srgbClr val="52575F"/>
-                                    </a:solidFill>
-                                    <a:latin typeface="Cambria Math" panose="02040503050406030204" pitchFamily="18" charset="0"/>
-                                  </a:rPr>
-                                  <m:t>𝑝</m:t>
-                                </m:r>
-                              </m:lim>
-                            </m:limUpp>
-                            <m:sSub>
-                              <m:sSubPr>
-                                <m:ctrlPr>
-                                  <a:rPr sz="2391" i="1">
-                                    <a:solidFill>
-                                      <a:srgbClr val="52575F"/>
-                                    </a:solidFill>
-                                    <a:latin typeface="Cambria Math" panose="02040503050406030204" pitchFamily="18" charset="0"/>
-                                  </a:rPr>
-                                </m:ctrlPr>
-                              </m:sSubPr>
-                              <m:e>
-                                <m:r>
-                                  <a:rPr sz="2391" i="1">
-                                    <a:solidFill>
-                                      <a:srgbClr val="52575F"/>
-                                    </a:solidFill>
-                                    <a:latin typeface="Cambria Math" panose="02040503050406030204" pitchFamily="18" charset="0"/>
-                                  </a:rPr>
-                                  <m:t>𝛽</m:t>
-                                </m:r>
-                              </m:e>
-                              <m:sub>
-                                <m:r>
-                                  <a:rPr sz="2391" i="1">
-                                    <a:solidFill>
-                                      <a:srgbClr val="52575F"/>
-                                    </a:solidFill>
-                                    <a:latin typeface="Cambria Math" panose="02040503050406030204" pitchFamily="18" charset="0"/>
-                                  </a:rPr>
-                                  <m:t>𝑗</m:t>
-                                </m:r>
-                              </m:sub>
-                            </m:sSub>
-                            <m:sSub>
-                              <m:sSubPr>
-                                <m:ctrlPr>
-                                  <a:rPr sz="2391" i="1">
-                                    <a:solidFill>
-                                      <a:srgbClr val="52575F"/>
-                                    </a:solidFill>
-                                    <a:latin typeface="Cambria Math" panose="02040503050406030204" pitchFamily="18" charset="0"/>
-                                  </a:rPr>
-                                </m:ctrlPr>
-                              </m:sSubPr>
-                              <m:e>
-                                <m:r>
-                                  <a:rPr sz="2391" i="1">
-                                    <a:solidFill>
-                                      <a:srgbClr val="52575F"/>
-                                    </a:solidFill>
-                                    <a:latin typeface="Cambria Math" panose="02040503050406030204" pitchFamily="18" charset="0"/>
-                                  </a:rPr>
-                                  <m:t>𝑥</m:t>
-                                </m:r>
-                              </m:e>
-                              <m:sub>
-                                <m:r>
-                                  <a:rPr sz="2391" i="1">
-                                    <a:solidFill>
-                                      <a:srgbClr val="52575F"/>
-                                    </a:solidFill>
-                                    <a:latin typeface="Cambria Math" panose="02040503050406030204" pitchFamily="18" charset="0"/>
-                                  </a:rPr>
-                                  <m:t>𝑖𝑗</m:t>
-                                </m:r>
-                              </m:sub>
-                            </m:sSub>
-                          </m:e>
-                        </m:d>
-                      </m:e>
-                      <m:sup>
-                        <m:r>
-                          <a:rPr sz="2391" i="1">
-                            <a:solidFill>
-                              <a:srgbClr val="52575F"/>
-                            </a:solidFill>
-                            <a:latin typeface="Cambria Math" panose="02040503050406030204" pitchFamily="18" charset="0"/>
-                          </a:rPr>
-                          <m:t>2</m:t>
-                        </m:r>
-                      </m:sup>
-                    </m:sSup>
-                    <m:r>
-                      <a:rPr sz="2391" i="1">
-                        <a:solidFill>
-                          <a:srgbClr val="52575F"/>
-                        </a:solidFill>
-                        <a:latin typeface="Cambria Math" panose="02040503050406030204" pitchFamily="18" charset="0"/>
-                      </a:rPr>
-                      <m:t>+</m:t>
-                    </m:r>
-                    <m:r>
-                      <a:rPr sz="2391" i="1">
-                        <a:solidFill>
-                          <a:srgbClr val="52575F"/>
-                        </a:solidFill>
-                        <a:latin typeface="Cambria Math" panose="02040503050406030204" pitchFamily="18" charset="0"/>
-                      </a:rPr>
-                      <m:t>𝛼</m:t>
-                    </m:r>
-                    <m:limUpp>
-                      <m:limUppPr>
-                        <m:ctrlPr>
-                          <a:rPr sz="2391" i="1">
-                            <a:solidFill>
-                              <a:srgbClr val="52575F"/>
-                            </a:solidFill>
-                            <a:latin typeface="Cambria Math" panose="02040503050406030204" pitchFamily="18" charset="0"/>
-                          </a:rPr>
-                        </m:ctrlPr>
-                      </m:limUppPr>
-                      <m:e>
-                        <m:limLow>
-                          <m:limLowPr>
-                            <m:ctrlPr>
-                              <a:rPr sz="2391" i="1">
-                                <a:solidFill>
-                                  <a:srgbClr val="52575F"/>
-                                </a:solidFill>
-                                <a:latin typeface="Cambria Math" panose="02040503050406030204" pitchFamily="18" charset="0"/>
-                              </a:rPr>
-                            </m:ctrlPr>
-                          </m:limLowPr>
-                          <m:e>
-                            <m:r>
-                              <a:rPr sz="2391" i="1">
-                                <a:solidFill>
-                                  <a:srgbClr val="52575F"/>
-                                </a:solidFill>
-                                <a:latin typeface="Cambria Math" panose="02040503050406030204" pitchFamily="18" charset="0"/>
-                              </a:rPr>
-                              <m:t>∑</m:t>
-                            </m:r>
-                          </m:e>
-                          <m:lim>
-                            <m:r>
-                              <a:rPr sz="2391" i="1">
-                                <a:solidFill>
-                                  <a:srgbClr val="52575F"/>
-                                </a:solidFill>
-                                <a:latin typeface="Cambria Math" panose="02040503050406030204" pitchFamily="18" charset="0"/>
-                              </a:rPr>
-                              <m:t>𝑗</m:t>
-                            </m:r>
-                            <m:r>
-                              <a:rPr sz="2391" i="1">
-                                <a:solidFill>
-                                  <a:srgbClr val="52575F"/>
-                                </a:solidFill>
-                                <a:latin typeface="Cambria Math" panose="02040503050406030204" pitchFamily="18" charset="0"/>
-                              </a:rPr>
-                              <m:t>=1</m:t>
-                            </m:r>
-                          </m:lim>
-                        </m:limLow>
-                      </m:e>
-                      <m:lim>
-                        <m:r>
-                          <a:rPr sz="2391" i="1">
-                            <a:solidFill>
-                              <a:srgbClr val="52575F"/>
-                            </a:solidFill>
-                            <a:latin typeface="Cambria Math" panose="02040503050406030204" pitchFamily="18" charset="0"/>
-                          </a:rPr>
-                          <m:t>𝑝</m:t>
-                        </m:r>
-                      </m:lim>
-                    </m:limUpp>
-                    <m:d>
-                      <m:dPr>
-                        <m:begChr m:val="|"/>
-                        <m:endChr m:val="|"/>
-                        <m:ctrlPr>
-                          <a:rPr sz="2391" i="1">
-                            <a:solidFill>
-                              <a:srgbClr val="52575F"/>
-                            </a:solidFill>
-                            <a:latin typeface="Cambria Math" panose="02040503050406030204" pitchFamily="18" charset="0"/>
-                          </a:rPr>
-                        </m:ctrlPr>
-                      </m:dPr>
-                      <m:e>
-                        <m:sSub>
-                          <m:sSubPr>
-                            <m:ctrlPr>
-                              <a:rPr sz="2391" i="1">
-                                <a:solidFill>
-                                  <a:srgbClr val="52575F"/>
-                                </a:solidFill>
-                                <a:latin typeface="Cambria Math" panose="02040503050406030204" pitchFamily="18" charset="0"/>
-                              </a:rPr>
-                            </m:ctrlPr>
-                          </m:sSubPr>
-                          <m:e>
-                            <m:r>
-                              <a:rPr sz="2391" i="1">
-                                <a:solidFill>
-                                  <a:srgbClr val="52575F"/>
-                                </a:solidFill>
-                                <a:latin typeface="Cambria Math" panose="02040503050406030204" pitchFamily="18" charset="0"/>
-                              </a:rPr>
-                              <m:t>𝛽</m:t>
-                            </m:r>
-                          </m:e>
-                          <m:sub>
-                            <m:r>
-                              <a:rPr sz="2391" i="1">
-                                <a:solidFill>
-                                  <a:srgbClr val="52575F"/>
-                                </a:solidFill>
-                                <a:latin typeface="Cambria Math" panose="02040503050406030204" pitchFamily="18" charset="0"/>
-                              </a:rPr>
-                              <m:t>𝑗</m:t>
-                            </m:r>
-                          </m:sub>
-                        </m:sSub>
-                      </m:e>
-                    </m:d>
-                  </m:oMath>
-                </a14:m>
-                <a:r>
-                  <a:rPr lang="en-US"/>
-                  <a:t>,  </a:t>
-                </a:r>
-                <a:r>
-                  <a:t> (where </a:t>
-                </a:r>
-                <a14:m>
-                  <m:oMath xmlns:m="http://schemas.openxmlformats.org/officeDocument/2006/math">
-                    <m:r>
-                      <a:rPr sz="2391" i="1">
-                        <a:solidFill>
-                          <a:srgbClr val="52575F"/>
-                        </a:solidFill>
-                        <a:latin typeface="Cambria Math" panose="02040503050406030204" pitchFamily="18" charset="0"/>
-                      </a:rPr>
-                      <m:t>𝛼</m:t>
-                    </m:r>
-                    <m:r>
-                      <a:rPr sz="2391" i="1">
-                        <a:solidFill>
-                          <a:srgbClr val="52575F"/>
-                        </a:solidFill>
-                        <a:latin typeface="Cambria Math" panose="02040503050406030204" pitchFamily="18" charset="0"/>
-                      </a:rPr>
-                      <m:t>&gt;0</m:t>
-                    </m:r>
-                  </m:oMath>
-                </a14:m>
-                <a:r>
-                  <a:t>)</a:t>
-                </a:r>
-              </a:p>
-              <a:p>
-                <a:r>
-                  <a:rPr b="1" u="sng">
-                    <a:latin typeface="Graphik"/>
-                    <a:ea typeface="Graphik"/>
-                    <a:cs typeface="Graphik"/>
-                    <a:sym typeface="Graphik"/>
-                  </a:rPr>
-                  <a:t>Ridge</a:t>
-                </a:r>
-                <a:r>
-                  <a:t> linear regression cost function </a:t>
-                </a:r>
-                <a:br>
-                  <a:rPr/>
-                </a:br>
-                <a14:m>
-                  <m:oMath xmlns:m="http://schemas.openxmlformats.org/officeDocument/2006/math">
-                    <m:sSub>
-                      <m:sSubPr>
-                        <m:ctrlPr>
-                          <a:rPr sz="2391" i="1">
-                            <a:solidFill>
-                              <a:srgbClr val="52575F"/>
-                            </a:solidFill>
-                            <a:latin typeface="Cambria Math" panose="02040503050406030204" pitchFamily="18" charset="0"/>
-                          </a:rPr>
-                        </m:ctrlPr>
-                      </m:sSubPr>
-                      <m:e>
-                        <m:r>
-                          <a:rPr sz="2391" i="1">
-                            <a:solidFill>
-                              <a:srgbClr val="52575F"/>
-                            </a:solidFill>
-                            <a:latin typeface="Cambria Math" panose="02040503050406030204" pitchFamily="18" charset="0"/>
-                          </a:rPr>
-                          <m:t>𝐽</m:t>
-                        </m:r>
-                      </m:e>
-                      <m:sub>
-                        <m:r>
-                          <a:rPr sz="2391" i="1">
-                            <a:solidFill>
-                              <a:srgbClr val="52575F"/>
-                            </a:solidFill>
-                            <a:latin typeface="Cambria Math" panose="02040503050406030204" pitchFamily="18" charset="0"/>
-                          </a:rPr>
-                          <m:t>𝑟𝑖𝑑𝑔𝑒</m:t>
-                        </m:r>
-                      </m:sub>
-                    </m:sSub>
-                    <m:r>
-                      <a:rPr sz="2391" i="1">
-                        <a:solidFill>
-                          <a:srgbClr val="52575F"/>
-                        </a:solidFill>
-                        <a:latin typeface="Cambria Math" panose="02040503050406030204" pitchFamily="18" charset="0"/>
-                      </a:rPr>
-                      <m:t>(</m:t>
-                    </m:r>
-                    <m:r>
-                      <a:rPr sz="2391" i="1">
-                        <a:solidFill>
-                          <a:srgbClr val="52575F"/>
-                        </a:solidFill>
-                        <a:latin typeface="Cambria Math" panose="02040503050406030204" pitchFamily="18" charset="0"/>
-                      </a:rPr>
-                      <m:t>𝛽</m:t>
-                    </m:r>
-                    <m:r>
-                      <a:rPr sz="2391" i="1">
-                        <a:solidFill>
-                          <a:srgbClr val="52575F"/>
-                        </a:solidFill>
-                        <a:latin typeface="Cambria Math" panose="02040503050406030204" pitchFamily="18" charset="0"/>
-                      </a:rPr>
-                      <m:t>)=</m:t>
-                    </m:r>
-                    <m:f>
-                      <m:fPr>
-                        <m:ctrlPr>
-                          <a:rPr sz="2391" i="1">
-                            <a:solidFill>
-                              <a:srgbClr val="52575F"/>
-                            </a:solidFill>
-                            <a:latin typeface="Cambria Math" panose="02040503050406030204" pitchFamily="18" charset="0"/>
-                          </a:rPr>
-                        </m:ctrlPr>
-                      </m:fPr>
-                      <m:num>
-                        <m:r>
-                          <a:rPr sz="2391" i="1">
-                            <a:solidFill>
-                              <a:srgbClr val="52575F"/>
-                            </a:solidFill>
-                            <a:latin typeface="Cambria Math" panose="02040503050406030204" pitchFamily="18" charset="0"/>
-                          </a:rPr>
-                          <m:t>1</m:t>
-                        </m:r>
-                      </m:num>
-                      <m:den>
-                        <m:r>
-                          <a:rPr sz="2391" i="1">
-                            <a:solidFill>
-                              <a:srgbClr val="52575F"/>
-                            </a:solidFill>
-                            <a:latin typeface="Cambria Math" panose="02040503050406030204" pitchFamily="18" charset="0"/>
-                          </a:rPr>
-                          <m:t>𝑛</m:t>
-                        </m:r>
-                      </m:den>
-                    </m:f>
-                    <m:limUpp>
-                      <m:limUppPr>
-                        <m:ctrlPr>
-                          <a:rPr sz="2391" i="1">
-                            <a:solidFill>
-                              <a:srgbClr val="52575F"/>
-                            </a:solidFill>
-                            <a:latin typeface="Cambria Math" panose="02040503050406030204" pitchFamily="18" charset="0"/>
-                          </a:rPr>
-                        </m:ctrlPr>
-                      </m:limUppPr>
-                      <m:e>
-                        <m:limLow>
-                          <m:limLowPr>
-                            <m:ctrlPr>
-                              <a:rPr sz="2391" i="1">
-                                <a:solidFill>
-                                  <a:srgbClr val="52575F"/>
-                                </a:solidFill>
-                                <a:latin typeface="Cambria Math" panose="02040503050406030204" pitchFamily="18" charset="0"/>
-                              </a:rPr>
-                            </m:ctrlPr>
-                          </m:limLowPr>
-                          <m:e>
-                            <m:r>
-                              <a:rPr sz="2391" i="1">
-                                <a:solidFill>
-                                  <a:srgbClr val="52575F"/>
-                                </a:solidFill>
-                                <a:latin typeface="Cambria Math" panose="02040503050406030204" pitchFamily="18" charset="0"/>
-                              </a:rPr>
-                              <m:t>∑</m:t>
-                            </m:r>
-                          </m:e>
-                          <m:lim>
-                            <m:r>
-                              <a:rPr sz="2391" i="1">
-                                <a:solidFill>
-                                  <a:srgbClr val="52575F"/>
-                                </a:solidFill>
-                                <a:latin typeface="Cambria Math" panose="02040503050406030204" pitchFamily="18" charset="0"/>
-                              </a:rPr>
-                              <m:t>𝑖</m:t>
-                            </m:r>
-                            <m:r>
-                              <a:rPr sz="2391" i="1">
-                                <a:solidFill>
-                                  <a:srgbClr val="52575F"/>
-                                </a:solidFill>
-                                <a:latin typeface="Cambria Math" panose="02040503050406030204" pitchFamily="18" charset="0"/>
-                              </a:rPr>
-                              <m:t>=1</m:t>
-                            </m:r>
-                          </m:lim>
-                        </m:limLow>
-                      </m:e>
-                      <m:lim>
-                        <m:r>
-                          <a:rPr sz="2391" i="1">
-                            <a:solidFill>
-                              <a:srgbClr val="52575F"/>
-                            </a:solidFill>
-                            <a:latin typeface="Cambria Math" panose="02040503050406030204" pitchFamily="18" charset="0"/>
-                          </a:rPr>
-                          <m:t>𝑛</m:t>
-                        </m:r>
-                      </m:lim>
-                    </m:limUpp>
-                    <m:sSup>
-                      <m:sSupPr>
-                        <m:ctrlPr>
-                          <a:rPr sz="2391" i="1">
-                            <a:solidFill>
-                              <a:srgbClr val="52575F"/>
-                            </a:solidFill>
-                            <a:latin typeface="Cambria Math" panose="02040503050406030204" pitchFamily="18" charset="0"/>
-                          </a:rPr>
-                        </m:ctrlPr>
-                      </m:sSupPr>
-                      <m:e>
-                        <m:d>
-                          <m:dPr>
-                            <m:ctrlPr>
-                              <a:rPr sz="2391" i="1">
-                                <a:solidFill>
-                                  <a:srgbClr val="52575F"/>
-                                </a:solidFill>
-                                <a:latin typeface="Cambria Math" panose="02040503050406030204" pitchFamily="18" charset="0"/>
-                              </a:rPr>
-                            </m:ctrlPr>
-                          </m:dPr>
-                          <m:e>
-                            <m:sSub>
-                              <m:sSubPr>
-                                <m:ctrlPr>
-                                  <a:rPr sz="2391" i="1">
-                                    <a:solidFill>
-                                      <a:srgbClr val="52575F"/>
-                                    </a:solidFill>
-                                    <a:latin typeface="Cambria Math" panose="02040503050406030204" pitchFamily="18" charset="0"/>
-                                  </a:rPr>
-                                </m:ctrlPr>
-                              </m:sSubPr>
-                              <m:e>
-                                <m:r>
-                                  <a:rPr sz="2391" i="1">
-                                    <a:solidFill>
-                                      <a:srgbClr val="52575F"/>
-                                    </a:solidFill>
-                                    <a:latin typeface="Cambria Math" panose="02040503050406030204" pitchFamily="18" charset="0"/>
-                                  </a:rPr>
-                                  <m:t>𝑦</m:t>
-                                </m:r>
-                              </m:e>
-                              <m:sub>
-                                <m:r>
-                                  <a:rPr sz="2391" i="1">
-                                    <a:solidFill>
-                                      <a:srgbClr val="52575F"/>
-                                    </a:solidFill>
-                                    <a:latin typeface="Cambria Math" panose="02040503050406030204" pitchFamily="18" charset="0"/>
-                                  </a:rPr>
-                                  <m:t>𝑖</m:t>
-                                </m:r>
-                              </m:sub>
-                            </m:sSub>
-                            <m:r>
-                              <a:rPr sz="2391" i="1">
-                                <a:solidFill>
-                                  <a:srgbClr val="52575F"/>
-                                </a:solidFill>
-                                <a:latin typeface="Cambria Math" panose="02040503050406030204" pitchFamily="18" charset="0"/>
-                              </a:rPr>
-                              <m:t>−</m:t>
-                            </m:r>
-                            <m:sSub>
-                              <m:sSubPr>
-                                <m:ctrlPr>
-                                  <a:rPr sz="2391" i="1">
-                                    <a:solidFill>
-                                      <a:srgbClr val="52575F"/>
-                                    </a:solidFill>
-                                    <a:latin typeface="Cambria Math" panose="02040503050406030204" pitchFamily="18" charset="0"/>
-                                  </a:rPr>
-                                </m:ctrlPr>
-                              </m:sSubPr>
-                              <m:e>
-                                <m:r>
-                                  <a:rPr sz="2391" i="1">
-                                    <a:solidFill>
-                                      <a:srgbClr val="52575F"/>
-                                    </a:solidFill>
-                                    <a:latin typeface="Cambria Math" panose="02040503050406030204" pitchFamily="18" charset="0"/>
-                                  </a:rPr>
-                                  <m:t>𝛽</m:t>
-                                </m:r>
-                              </m:e>
-                              <m:sub>
-                                <m:r>
-                                  <a:rPr sz="2391" i="1">
-                                    <a:solidFill>
-                                      <a:srgbClr val="52575F"/>
-                                    </a:solidFill>
-                                    <a:latin typeface="Cambria Math" panose="02040503050406030204" pitchFamily="18" charset="0"/>
-                                  </a:rPr>
-                                  <m:t>0</m:t>
-                                </m:r>
-                              </m:sub>
-                            </m:sSub>
-                            <m:r>
-                              <a:rPr sz="2391" i="1">
-                                <a:solidFill>
-                                  <a:srgbClr val="52575F"/>
-                                </a:solidFill>
-                                <a:latin typeface="Cambria Math" panose="02040503050406030204" pitchFamily="18" charset="0"/>
-                              </a:rPr>
-                              <m:t>−</m:t>
-                            </m:r>
-                            <m:limUpp>
-                              <m:limUppPr>
-                                <m:ctrlPr>
-                                  <a:rPr sz="2391" i="1">
-                                    <a:solidFill>
-                                      <a:srgbClr val="52575F"/>
-                                    </a:solidFill>
-                                    <a:latin typeface="Cambria Math" panose="02040503050406030204" pitchFamily="18" charset="0"/>
-                                  </a:rPr>
-                                </m:ctrlPr>
-                              </m:limUppPr>
-                              <m:e>
-                                <m:limLow>
-                                  <m:limLowPr>
-                                    <m:ctrlPr>
-                                      <a:rPr sz="2391" i="1">
-                                        <a:solidFill>
-                                          <a:srgbClr val="52575F"/>
-                                        </a:solidFill>
-                                        <a:latin typeface="Cambria Math" panose="02040503050406030204" pitchFamily="18" charset="0"/>
-                                      </a:rPr>
-                                    </m:ctrlPr>
-                                  </m:limLowPr>
-                                  <m:e>
-                                    <m:r>
-                                      <a:rPr sz="2391" i="1">
-                                        <a:solidFill>
-                                          <a:srgbClr val="52575F"/>
-                                        </a:solidFill>
-                                        <a:latin typeface="Cambria Math" panose="02040503050406030204" pitchFamily="18" charset="0"/>
-                                      </a:rPr>
-                                      <m:t>∑</m:t>
-                                    </m:r>
-                                  </m:e>
-                                  <m:lim>
-                                    <m:r>
-                                      <a:rPr sz="2391" i="1">
-                                        <a:solidFill>
-                                          <a:srgbClr val="52575F"/>
-                                        </a:solidFill>
-                                        <a:latin typeface="Cambria Math" panose="02040503050406030204" pitchFamily="18" charset="0"/>
-                                      </a:rPr>
-                                      <m:t>𝑗</m:t>
-                                    </m:r>
-                                    <m:r>
-                                      <a:rPr sz="2391" i="1">
-                                        <a:solidFill>
-                                          <a:srgbClr val="52575F"/>
-                                        </a:solidFill>
-                                        <a:latin typeface="Cambria Math" panose="02040503050406030204" pitchFamily="18" charset="0"/>
-                                      </a:rPr>
-                                      <m:t>=1</m:t>
-                                    </m:r>
-                                  </m:lim>
-                                </m:limLow>
-                              </m:e>
-                              <m:lim>
-                                <m:r>
-                                  <a:rPr sz="2391" i="1">
-                                    <a:solidFill>
-                                      <a:srgbClr val="52575F"/>
-                                    </a:solidFill>
-                                    <a:latin typeface="Cambria Math" panose="02040503050406030204" pitchFamily="18" charset="0"/>
-                                  </a:rPr>
-                                  <m:t>𝑝</m:t>
-                                </m:r>
-                              </m:lim>
-                            </m:limUpp>
-                            <m:sSub>
-                              <m:sSubPr>
-                                <m:ctrlPr>
-                                  <a:rPr sz="2391" i="1">
-                                    <a:solidFill>
-                                      <a:srgbClr val="52575F"/>
-                                    </a:solidFill>
-                                    <a:latin typeface="Cambria Math" panose="02040503050406030204" pitchFamily="18" charset="0"/>
-                                  </a:rPr>
-                                </m:ctrlPr>
-                              </m:sSubPr>
-                              <m:e>
-                                <m:r>
-                                  <a:rPr sz="2391" i="1">
-                                    <a:solidFill>
-                                      <a:srgbClr val="52575F"/>
-                                    </a:solidFill>
-                                    <a:latin typeface="Cambria Math" panose="02040503050406030204" pitchFamily="18" charset="0"/>
-                                  </a:rPr>
-                                  <m:t>𝛽</m:t>
-                                </m:r>
-                              </m:e>
-                              <m:sub>
-                                <m:r>
-                                  <a:rPr sz="2391" i="1">
-                                    <a:solidFill>
-                                      <a:srgbClr val="52575F"/>
-                                    </a:solidFill>
-                                    <a:latin typeface="Cambria Math" panose="02040503050406030204" pitchFamily="18" charset="0"/>
-                                  </a:rPr>
-                                  <m:t>𝑗</m:t>
-                                </m:r>
-                              </m:sub>
-                            </m:sSub>
-                            <m:sSub>
-                              <m:sSubPr>
-                                <m:ctrlPr>
-                                  <a:rPr sz="2391" i="1">
-                                    <a:solidFill>
-                                      <a:srgbClr val="52575F"/>
-                                    </a:solidFill>
-                                    <a:latin typeface="Cambria Math" panose="02040503050406030204" pitchFamily="18" charset="0"/>
-                                  </a:rPr>
-                                </m:ctrlPr>
-                              </m:sSubPr>
-                              <m:e>
-                                <m:r>
-                                  <a:rPr sz="2391" i="1">
-                                    <a:solidFill>
-                                      <a:srgbClr val="52575F"/>
-                                    </a:solidFill>
-                                    <a:latin typeface="Cambria Math" panose="02040503050406030204" pitchFamily="18" charset="0"/>
-                                  </a:rPr>
-                                  <m:t>𝑥</m:t>
-                                </m:r>
-                              </m:e>
-                              <m:sub>
-                                <m:r>
-                                  <a:rPr sz="2391" i="1">
-                                    <a:solidFill>
-                                      <a:srgbClr val="52575F"/>
-                                    </a:solidFill>
-                                    <a:latin typeface="Cambria Math" panose="02040503050406030204" pitchFamily="18" charset="0"/>
-                                  </a:rPr>
-                                  <m:t>𝑖𝑗</m:t>
-                                </m:r>
-                              </m:sub>
-                            </m:sSub>
-                          </m:e>
-                        </m:d>
-                      </m:e>
-                      <m:sup>
-                        <m:r>
-                          <a:rPr sz="2391" i="1">
-                            <a:solidFill>
-                              <a:srgbClr val="52575F"/>
-                            </a:solidFill>
-                            <a:latin typeface="Cambria Math" panose="02040503050406030204" pitchFamily="18" charset="0"/>
-                          </a:rPr>
-                          <m:t>2</m:t>
-                        </m:r>
-                      </m:sup>
-                    </m:sSup>
-                    <m:r>
-                      <a:rPr sz="2391" i="1">
-                        <a:solidFill>
-                          <a:srgbClr val="52575F"/>
-                        </a:solidFill>
-                        <a:latin typeface="Cambria Math" panose="02040503050406030204" pitchFamily="18" charset="0"/>
-                      </a:rPr>
-                      <m:t>+</m:t>
-                    </m:r>
-                    <m:r>
-                      <a:rPr sz="2391" i="1">
-                        <a:solidFill>
-                          <a:srgbClr val="52575F"/>
-                        </a:solidFill>
-                        <a:latin typeface="Cambria Math" panose="02040503050406030204" pitchFamily="18" charset="0"/>
-                      </a:rPr>
-                      <m:t>𝛼</m:t>
-                    </m:r>
-                    <m:limUpp>
-                      <m:limUppPr>
-                        <m:ctrlPr>
-                          <a:rPr sz="2391" i="1">
-                            <a:solidFill>
-                              <a:srgbClr val="52575F"/>
-                            </a:solidFill>
-                            <a:latin typeface="Cambria Math" panose="02040503050406030204" pitchFamily="18" charset="0"/>
-                          </a:rPr>
-                        </m:ctrlPr>
-                      </m:limUppPr>
-                      <m:e>
-                        <m:limLow>
-                          <m:limLowPr>
-                            <m:ctrlPr>
-                              <a:rPr sz="2391" i="1">
-                                <a:solidFill>
-                                  <a:srgbClr val="52575F"/>
-                                </a:solidFill>
-                                <a:latin typeface="Cambria Math" panose="02040503050406030204" pitchFamily="18" charset="0"/>
-                              </a:rPr>
-                            </m:ctrlPr>
-                          </m:limLowPr>
-                          <m:e>
-                            <m:r>
-                              <a:rPr sz="2391" i="1">
-                                <a:solidFill>
-                                  <a:srgbClr val="52575F"/>
-                                </a:solidFill>
-                                <a:latin typeface="Cambria Math" panose="02040503050406030204" pitchFamily="18" charset="0"/>
-                              </a:rPr>
-                              <m:t>∑</m:t>
-                            </m:r>
-                          </m:e>
-                          <m:lim>
-                            <m:r>
-                              <a:rPr sz="2391" i="1">
-                                <a:solidFill>
-                                  <a:srgbClr val="52575F"/>
-                                </a:solidFill>
-                                <a:latin typeface="Cambria Math" panose="02040503050406030204" pitchFamily="18" charset="0"/>
-                              </a:rPr>
-                              <m:t>𝑗</m:t>
-                            </m:r>
-                            <m:r>
-                              <a:rPr sz="2391" i="1">
-                                <a:solidFill>
-                                  <a:srgbClr val="52575F"/>
-                                </a:solidFill>
-                                <a:latin typeface="Cambria Math" panose="02040503050406030204" pitchFamily="18" charset="0"/>
-                              </a:rPr>
-                              <m:t>=1</m:t>
-                            </m:r>
-                          </m:lim>
-                        </m:limLow>
-                      </m:e>
-                      <m:lim>
-                        <m:r>
-                          <a:rPr sz="2391" i="1">
-                            <a:solidFill>
-                              <a:srgbClr val="52575F"/>
-                            </a:solidFill>
-                            <a:latin typeface="Cambria Math" panose="02040503050406030204" pitchFamily="18" charset="0"/>
-                          </a:rPr>
-                          <m:t>𝑝</m:t>
-                        </m:r>
-                      </m:lim>
-                    </m:limUpp>
-                    <m:sSup>
-                      <m:sSupPr>
-                        <m:ctrlPr>
-                          <a:rPr sz="2391" i="1">
-                            <a:solidFill>
-                              <a:srgbClr val="52575F"/>
-                            </a:solidFill>
-                            <a:latin typeface="Cambria Math" panose="02040503050406030204" pitchFamily="18" charset="0"/>
-                          </a:rPr>
-                        </m:ctrlPr>
-                      </m:sSupPr>
-                      <m:e>
-                        <m:d>
-                          <m:dPr>
-                            <m:ctrlPr>
-                              <a:rPr sz="2391" i="1">
-                                <a:solidFill>
-                                  <a:srgbClr val="52575F"/>
-                                </a:solidFill>
-                                <a:latin typeface="Cambria Math" panose="02040503050406030204" pitchFamily="18" charset="0"/>
-                              </a:rPr>
-                            </m:ctrlPr>
-                          </m:dPr>
-                          <m:e>
-                            <m:sSub>
-                              <m:sSubPr>
-                                <m:ctrlPr>
-                                  <a:rPr sz="2391" i="1">
-                                    <a:solidFill>
-                                      <a:srgbClr val="52575F"/>
-                                    </a:solidFill>
-                                    <a:latin typeface="Cambria Math" panose="02040503050406030204" pitchFamily="18" charset="0"/>
-                                  </a:rPr>
-                                </m:ctrlPr>
-                              </m:sSubPr>
-                              <m:e>
-                                <m:r>
-                                  <a:rPr sz="2391" i="1">
-                                    <a:solidFill>
-                                      <a:srgbClr val="52575F"/>
-                                    </a:solidFill>
-                                    <a:latin typeface="Cambria Math" panose="02040503050406030204" pitchFamily="18" charset="0"/>
-                                  </a:rPr>
-                                  <m:t>𝛽</m:t>
-                                </m:r>
-                              </m:e>
-                              <m:sub>
-                                <m:r>
-                                  <a:rPr sz="2391" i="1">
-                                    <a:solidFill>
-                                      <a:srgbClr val="52575F"/>
-                                    </a:solidFill>
-                                    <a:latin typeface="Cambria Math" panose="02040503050406030204" pitchFamily="18" charset="0"/>
-                                  </a:rPr>
-                                  <m:t>𝑗</m:t>
-                                </m:r>
-                              </m:sub>
-                            </m:sSub>
-                          </m:e>
-                        </m:d>
-                      </m:e>
-                      <m:sup>
-                        <m:r>
-                          <a:rPr sz="2391" i="1">
-                            <a:solidFill>
-                              <a:srgbClr val="52575F"/>
-                            </a:solidFill>
-                            <a:latin typeface="Cambria Math" panose="02040503050406030204" pitchFamily="18" charset="0"/>
-                          </a:rPr>
-                          <m:t>2</m:t>
-                        </m:r>
-                      </m:sup>
-                    </m:sSup>
-                    <m:r>
-                      <a:rPr lang="en-US" sz="2391" b="0" i="1" smtClean="0">
-                        <a:solidFill>
-                          <a:srgbClr val="52575F"/>
-                        </a:solidFill>
-                        <a:latin typeface="Cambria Math" panose="02040503050406030204" pitchFamily="18" charset="0"/>
-                      </a:rPr>
-                      <m:t>,  </m:t>
-                    </m:r>
-                  </m:oMath>
-                </a14:m>
-                <a:r>
-                  <a:t> (where </a:t>
-                </a:r>
-                <a14:m>
-                  <m:oMath xmlns:m="http://schemas.openxmlformats.org/officeDocument/2006/math">
-                    <m:r>
-                      <a:rPr sz="2391" i="1">
-                        <a:solidFill>
-                          <a:srgbClr val="52575F"/>
-                        </a:solidFill>
-                        <a:latin typeface="Cambria Math" panose="02040503050406030204" pitchFamily="18" charset="0"/>
-                      </a:rPr>
-                      <m:t>𝛼</m:t>
-                    </m:r>
-                    <m:r>
-                      <a:rPr sz="2391" i="1">
-                        <a:solidFill>
-                          <a:srgbClr val="52575F"/>
-                        </a:solidFill>
-                        <a:latin typeface="Cambria Math" panose="02040503050406030204" pitchFamily="18" charset="0"/>
-                      </a:rPr>
-                      <m:t>&gt;0</m:t>
-                    </m:r>
-                  </m:oMath>
-                </a14:m>
-                <a:r>
-                  <a:t>)</a:t>
-                </a:r>
-                <a:endParaRPr>
-                  <a:solidFill>
-                    <a:srgbClr val="53585F"/>
-                  </a:solidFill>
-                </a:endParaRPr>
-              </a:p>
-            </p:txBody>
-          </p:sp>
-        </mc:Choice>
-        <mc:Fallback>
-          <p:sp>
-            <p:nvSpPr>
-              <p:cNvPr id="281" name="Lasso linear regression cost function    (where  )…"/>
-              <p:cNvSpPr txBox="1">
-                <a:spLocks noGrp="1" noRot="1" noChangeAspect="1" noMove="1" noResize="1" noEditPoints="1" noAdjustHandles="1" noChangeArrowheads="1" noChangeShapeType="1" noTextEdit="1"/>
-              </p:cNvSpPr>
-              <p:nvPr>
-                <p:ph type="body" idx="1"/>
-              </p:nvPr>
-            </p:nvSpPr>
-            <p:spPr>
-              <a:xfrm>
-                <a:off x="2015133" y="2134195"/>
-                <a:ext cx="9762339" cy="4232672"/>
-              </a:xfrm>
-              <a:prstGeom prst="rect">
-                <a:avLst/>
-              </a:prstGeom>
-              <a:blipFill>
-                <a:blip r:embed="rId2"/>
-                <a:stretch>
-                  <a:fillRect l="-562" t="-576"/>
-                </a:stretch>
-              </a:blipFill>
-            </p:spPr>
-            <p:txBody>
-              <a:bodyPr/>
-              <a:lstStyle/>
-              <a:p>
-                <a:r>
-                  <a:rPr lang="en-US">
-                    <a:noFill/>
-                  </a:rPr>
-                  <a:t> </a:t>
-                </a:r>
-              </a:p>
-            </p:txBody>
-          </p:sp>
-        </mc:Fallback>
-      </mc:AlternateContent>
-      <p:sp>
-        <p:nvSpPr>
-          <p:cNvPr id="282" name="ℓ1 penalty"/>
-          <p:cNvSpPr txBox="1"/>
-          <p:nvPr/>
-        </p:nvSpPr>
-        <p:spPr>
-          <a:xfrm>
-            <a:off x="750366" y="2134195"/>
-            <a:ext cx="1186223" cy="396712"/>
-          </a:xfrm>
-          <a:prstGeom prst="rect">
-            <a:avLst/>
-          </a:prstGeom>
-          <a:ln w="3175">
-            <a:miter lim="400000"/>
-          </a:ln>
-          <a:extLst>
-            <a:ext uri="{C572A759-6A51-4108-AA02-DFA0A04FC94B}">
-              <ma14:wrappingTextBoxFlag xmlns:ma14="http://schemas.microsoft.com/office/mac/drawingml/2011/main" xmlns:a14="http://schemas.microsoft.com/office/drawing/2010/main" xmlns:m="http://schemas.openxmlformats.org/officeDocument/2006/math" xmlns="" val="1"/>
-            </a:ext>
-          </a:extLst>
-        </p:spPr>
-        <p:txBody>
-          <a:bodyPr wrap="none" lIns="35719" tIns="35719" rIns="35719" bIns="35719" anchor="ctr">
-            <a:spAutoFit/>
-          </a:bodyPr>
-          <a:lstStyle/>
-          <a:p>
-            <a:pPr>
-              <a:defRPr sz="3000">
-                <a:solidFill>
-                  <a:srgbClr val="FF7E79"/>
-                </a:solidFill>
-                <a:latin typeface="Noteworthy Light"/>
-                <a:ea typeface="Noteworthy Light"/>
-                <a:cs typeface="Noteworthy Light"/>
-                <a:sym typeface="Noteworthy Light"/>
-              </a:defRPr>
-            </a:pPr>
-            <a:r>
-              <a:rPr sz="2109"/>
-              <a:t>ℓ</a:t>
-            </a:r>
-            <a:r>
-              <a:rPr sz="2109" baseline="-5999"/>
-              <a:t>1</a:t>
-            </a:r>
-            <a:r>
-              <a:rPr sz="2109"/>
-              <a:t> penalty</a:t>
-            </a:r>
-          </a:p>
-        </p:txBody>
-      </p:sp>
-      <p:sp>
-        <p:nvSpPr>
-          <p:cNvPr id="283" name="ℓ2 penalty"/>
-          <p:cNvSpPr txBox="1"/>
-          <p:nvPr/>
-        </p:nvSpPr>
-        <p:spPr>
-          <a:xfrm>
-            <a:off x="750367" y="3611607"/>
-            <a:ext cx="1186223" cy="396712"/>
-          </a:xfrm>
-          <a:prstGeom prst="rect">
-            <a:avLst/>
-          </a:prstGeom>
-          <a:ln w="3175">
-            <a:miter lim="400000"/>
-          </a:ln>
-          <a:extLst>
-            <a:ext uri="{C572A759-6A51-4108-AA02-DFA0A04FC94B}">
-              <ma14:wrappingTextBoxFlag xmlns:ma14="http://schemas.microsoft.com/office/mac/drawingml/2011/main" xmlns:a14="http://schemas.microsoft.com/office/drawing/2010/main" xmlns:m="http://schemas.openxmlformats.org/officeDocument/2006/math" xmlns="" val="1"/>
-            </a:ext>
-          </a:extLst>
-        </p:spPr>
-        <p:txBody>
-          <a:bodyPr wrap="none" lIns="35719" tIns="35719" rIns="35719" bIns="35719" anchor="ctr">
-            <a:spAutoFit/>
-          </a:bodyPr>
-          <a:lstStyle/>
-          <a:p>
-            <a:pPr>
-              <a:defRPr sz="3000">
-                <a:solidFill>
-                  <a:srgbClr val="FF7E79"/>
-                </a:solidFill>
-                <a:latin typeface="Noteworthy Light"/>
-                <a:ea typeface="Noteworthy Light"/>
-                <a:cs typeface="Noteworthy Light"/>
-                <a:sym typeface="Noteworthy Light"/>
-              </a:defRPr>
-            </a:pPr>
-            <a:r>
-              <a:rPr sz="2109"/>
-              <a:t>ℓ</a:t>
-            </a:r>
-            <a:r>
-              <a:rPr sz="2109" baseline="-5999"/>
-              <a:t>2</a:t>
-            </a:r>
-            <a:r>
-              <a:rPr sz="2109"/>
-              <a:t> penalty</a:t>
+              <a:rPr lang="en-US" dirty="0"/>
+              <a:t>The LASSO Regularization Path</a:t>
             </a:r>
           </a:p>
         </p:txBody>
       </p:sp>
       <p:pic>
         <p:nvPicPr>
-          <p:cNvPr id="4" name="Line Line" descr="Line Line">
-            <a:extLst>
-              <a:ext uri="{FF2B5EF4-FFF2-40B4-BE49-F238E27FC236}">
-                <a16:creationId xmlns:a16="http://schemas.microsoft.com/office/drawing/2014/main" id="{8CA19CC4-1DF1-B29F-C692-48823B16B344}"/>
-              </a:ext>
-            </a:extLst>
-          </p:cNvPr>
+          <p:cNvPr id="3" name="Lasso regularization path plot" descr="Coefficient paths for 10 standardized predictors as the LASSO penalty alpha increases; coefficients shrink and reach exactly zero one by one."/>
           <p:cNvPicPr>
-            <a:picLocks/>
+            <a:picLocks noChangeAspect="1"/>
           </p:cNvPicPr>
           <p:nvPr/>
         </p:nvPicPr>
@@ -12187,258 +12582,49 @@
         </p:blipFill>
         <p:spPr>
           <a:xfrm>
-            <a:off x="7835951" y="4990915"/>
-            <a:ext cx="1010290" cy="101029"/>
+            <a:off x="2461500" y="1450000"/>
+            <a:ext cx="7269000" cy="4200000"/>
           </a:xfrm>
           <a:prstGeom prst="rect">
             <a:avLst/>
           </a:prstGeom>
         </p:spPr>
       </p:pic>
-      <mc:AlternateContent xmlns:mc="http://schemas.openxmlformats.org/markup-compatibility/2006">
-        <mc:Choice xmlns:a14="http://schemas.microsoft.com/office/drawing/2010/main" Requires="a14">
-          <p:sp>
-            <p:nvSpPr>
-              <p:cNvPr id="5" name="Constrains the model (pushes  s to be close to but NOT exactly equal to 0)">
-                <a:extLst>
-                  <a:ext uri="{FF2B5EF4-FFF2-40B4-BE49-F238E27FC236}">
-                    <a16:creationId xmlns:a16="http://schemas.microsoft.com/office/drawing/2014/main" id="{29A72916-10DE-D9D2-562F-007E4E434EE5}"/>
-                  </a:ext>
-                </a:extLst>
-              </p:cNvPr>
-              <p:cNvSpPr txBox="1"/>
-              <p:nvPr/>
-            </p:nvSpPr>
-            <p:spPr>
-              <a:xfrm>
-                <a:off x="7478163" y="5266764"/>
-                <a:ext cx="2960401" cy="764633"/>
-              </a:xfrm>
-              <a:prstGeom prst="rect">
-                <a:avLst/>
-              </a:prstGeom>
-              <a:ln w="3175">
-                <a:miter lim="400000"/>
-              </a:ln>
-              <a:extLst>
-                <a:ext uri="{C572A759-6A51-4108-AA02-DFA0A04FC94B}">
-                  <ma14:wrappingTextBoxFlag xmlns:ma14="http://schemas.microsoft.com/office/mac/drawingml/2011/main" xmlns:m="http://schemas.openxmlformats.org/officeDocument/2006/math" xmlns="" val="1"/>
-                </a:ext>
-              </a:extLst>
-            </p:spPr>
-            <p:txBody>
-              <a:bodyPr lIns="35719" tIns="35719" rIns="35719" bIns="35719" anchor="ctr">
-                <a:spAutoFit/>
-              </a:bodyPr>
-              <a:lstStyle/>
-              <a:p>
-                <a:pPr>
-                  <a:defRPr>
-                    <a:solidFill>
-                      <a:srgbClr val="005493"/>
-                    </a:solidFill>
-                    <a:latin typeface="Noteworthy Light"/>
-                    <a:ea typeface="Noteworthy Light"/>
-                    <a:cs typeface="Noteworthy Light"/>
-                    <a:sym typeface="Noteworthy Light"/>
-                  </a:defRPr>
-                </a:pPr>
-                <a:r>
-                  <a:rPr sz="1266"/>
-                  <a:t>Constrains the model</a:t>
-                </a:r>
-                <a:br>
-                  <a:rPr sz="1266"/>
-                </a:br>
-                <a:r>
-                  <a:rPr sz="1617"/>
-                  <a:t>(pushes </a:t>
-                </a:r>
-                <a14:m>
-                  <m:oMath xmlns:m="http://schemas.openxmlformats.org/officeDocument/2006/math">
-                    <m:r>
-                      <a:rPr sz="1617" i="1">
-                        <a:solidFill>
-                          <a:srgbClr val="005392"/>
-                        </a:solidFill>
-                        <a:latin typeface="Cambria Math" panose="02040503050406030204" pitchFamily="18" charset="0"/>
-                      </a:rPr>
-                      <m:t>𝛽</m:t>
-                    </m:r>
-                  </m:oMath>
-                </a14:m>
-                <a:r>
-                  <a:rPr sz="1617"/>
-                  <a:t>s to be close to but NOT exactly equal to 0)</a:t>
-                </a:r>
-              </a:p>
-            </p:txBody>
-          </p:sp>
-        </mc:Choice>
-        <mc:Fallback>
-          <p:sp>
-            <p:nvSpPr>
-              <p:cNvPr id="5" name="Constrains the model (pushes  s to be close to but NOT exactly equal to 0)">
-                <a:extLst>
-                  <a:ext uri="{FF2B5EF4-FFF2-40B4-BE49-F238E27FC236}">
-                    <a16:creationId xmlns:a16="http://schemas.microsoft.com/office/drawing/2014/main" id="{29A72916-10DE-D9D2-562F-007E4E434EE5}"/>
-                  </a:ext>
-                </a:extLst>
-              </p:cNvPr>
-              <p:cNvSpPr txBox="1">
-                <a:spLocks noRot="1" noChangeAspect="1" noMove="1" noResize="1" noEditPoints="1" noAdjustHandles="1" noChangeArrowheads="1" noChangeShapeType="1" noTextEdit="1"/>
-              </p:cNvSpPr>
-              <p:nvPr/>
-            </p:nvSpPr>
-            <p:spPr>
-              <a:xfrm>
-                <a:off x="7478163" y="5266764"/>
-                <a:ext cx="2960401" cy="764633"/>
-              </a:xfrm>
-              <a:prstGeom prst="rect">
-                <a:avLst/>
-              </a:prstGeom>
-              <a:blipFill>
-                <a:blip r:embed="rId4"/>
-                <a:stretch>
-                  <a:fillRect l="-3093" t="-800" r="-2268" b="-12000"/>
-                </a:stretch>
-              </a:blipFill>
-              <a:ln w="3175">
-                <a:miter lim="400000"/>
-              </a:ln>
-              <a:extLst>
-                <a:ext uri="{C572A759-6A51-4108-AA02-DFA0A04FC94B}">
-                  <ma14:wrappingTextBoxFlag xmlns:a14="http://schemas.microsoft.com/office/drawing/2010/main" xmlns:ma14="http://schemas.microsoft.com/office/mac/drawingml/2011/main" xmlns:m="http://schemas.openxmlformats.org/officeDocument/2006/math" xmlns="" val="1"/>
-                </a:ext>
-              </a:extLst>
-            </p:spPr>
-            <p:txBody>
-              <a:bodyPr/>
-              <a:lstStyle/>
-              <a:p>
-                <a:r>
-                  <a:rPr lang="en-US">
-                    <a:noFill/>
-                  </a:rPr>
-                  <a:t> </a:t>
-                </a:r>
-              </a:p>
-            </p:txBody>
-          </p:sp>
-        </mc:Fallback>
-      </mc:AlternateContent>
+      <p:sp>
+        <p:nvSpPr>
+          <p:cNvPr id="4" name="Caption"/>
+          <p:cNvSpPr txBox="1"/>
+          <p:nvPr/>
+        </p:nvSpPr>
+        <p:spPr>
+          <a:xfrm>
+            <a:off x="2296000" y="5700000"/>
+            <a:ext cx="7600000" cy="400000"/>
+          </a:xfrm>
+          <a:prstGeom prst="rect">
+            <a:avLst/>
+          </a:prstGeom>
+          <a:noFill/>
+        </p:spPr>
+        <p:txBody>
+          <a:bodyPr wrap="square" rtlCol="0" anchor="t">
+            <a:normAutofit/>
+          </a:bodyPr>
+          <a:lstStyle/>
+          <a:p>
+            <a:pPr algn="ctr"/>
+            <a:r>
+              <a:rPr lang="en-US" sz="1200" i="1" dirty="0"/>
+              <a:t>Each curve is one predictor: as α grows, coefficients shrink and drop to exactly 0 — LASSO’s built-in variable selection.</a:t>
+            </a:r>
+          </a:p>
+        </p:txBody>
+      </p:sp>
     </p:spTree>
   </p:cSld>
   <p:clrMapOvr>
     <a:masterClrMapping/>
   </p:clrMapOvr>
-  <p:transition spd="med"/>
-  <p:timing>
-    <p:tnLst>
-      <p:par>
-        <p:cTn id="1" dur="indefinite" restart="never" nodeType="tmRoot">
-          <p:childTnLst>
-            <p:seq concurrent="1" nextAc="seek">
-              <p:cTn id="2" dur="indefinite" nodeType="mainSeq">
-                <p:childTnLst>
-                  <p:par>
-                    <p:cTn id="3" fill="hold">
-                      <p:stCondLst>
-                        <p:cond delay="indefinite"/>
-                      </p:stCondLst>
-                      <p:childTnLst>
-                        <p:par>
-                          <p:cTn id="4" fill="hold">
-                            <p:stCondLst>
-                              <p:cond delay="0"/>
-                            </p:stCondLst>
-                            <p:childTnLst>
-                              <p:par>
-                                <p:cTn id="5" presetID="1" presetClass="entr" presetSubtype="0" fill="hold" nodeType="clickEffect">
-                                  <p:stCondLst>
-                                    <p:cond delay="0"/>
-                                  </p:stCondLst>
-                                  <p:childTnLst>
-                                    <p:set>
-                                      <p:cBhvr>
-                                        <p:cTn id="6" dur="1" fill="hold">
-                                          <p:stCondLst>
-                                            <p:cond delay="0"/>
-                                          </p:stCondLst>
-                                        </p:cTn>
-                                        <p:tgtEl>
-                                          <p:spTgt spid="4"/>
-                                        </p:tgtEl>
-                                        <p:attrNameLst>
-                                          <p:attrName>style.visibility</p:attrName>
-                                        </p:attrNameLst>
-                                      </p:cBhvr>
-                                      <p:to>
-                                        <p:strVal val="visible"/>
-                                      </p:to>
-                                    </p:set>
-                                  </p:childTnLst>
-                                </p:cTn>
-                              </p:par>
-                              <p:par>
-                                <p:cTn id="7" presetID="1" presetClass="entr" presetSubtype="0" fill="hold" grpId="0" nodeType="withEffect">
-                                  <p:stCondLst>
-                                    <p:cond delay="0"/>
-                                  </p:stCondLst>
-                                  <p:childTnLst>
-                                    <p:set>
-                                      <p:cBhvr>
-                                        <p:cTn id="8" dur="1" fill="hold">
-                                          <p:stCondLst>
-                                            <p:cond delay="0"/>
-                                          </p:stCondLst>
-                                        </p:cTn>
-                                        <p:tgtEl>
-                                          <p:spTgt spid="5"/>
-                                        </p:tgtEl>
-                                        <p:attrNameLst>
-                                          <p:attrName>style.visibility</p:attrName>
-                                        </p:attrNameLst>
-                                      </p:cBhvr>
-                                      <p:to>
-                                        <p:strVal val="visible"/>
-                                      </p:to>
-                                    </p:set>
-                                  </p:childTnLst>
-                                </p:cTn>
-                              </p:par>
-                            </p:childTnLst>
-                          </p:cTn>
-                        </p:par>
-                      </p:childTnLst>
-                    </p:cTn>
-                  </p:par>
-                </p:childTnLst>
-              </p:cTn>
-              <p:prevCondLst>
-                <p:cond evt="onPrev" delay="0">
-                  <p:tgtEl>
-                    <p:sldTgt/>
-                  </p:tgtEl>
-                </p:cond>
-              </p:prevCondLst>
-              <p:nextCondLst>
-                <p:cond evt="onNext" delay="0">
-                  <p:tgtEl>
-                    <p:sldTgt/>
-                  </p:tgtEl>
-                </p:cond>
-              </p:nextCondLst>
-            </p:seq>
-          </p:childTnLst>
-        </p:cTn>
-      </p:par>
-    </p:tnLst>
-    <p:bldLst>
-      <p:bldP spid="5" grpId="0" animBg="1"/>
-    </p:bldLst>
-  </p:timing>
 </p:sld>
 </file>
 

--- a/slides/07-regularization.pptx
+++ b/slides/07-regularization.pptx
@@ -7302,124 +7302,90 @@
           <a:lstStyle/>
           <a:p>
             <a:r>
-              <a:rPr lang="el-GR"/>
+              <a:rPr lang="el-GR" dirty="0"/>
               <a:t>α </a:t>
             </a:r>
             <a:r>
+              <a:rPr lang="en-US" dirty="0"/>
+              <a:t>controls the bias–variance tradeoff</a:t>
+            </a:r>
+          </a:p>
+          <a:p>
+            <a:pPr lvl="1"/>
+            <a:r>
+              <a:rPr lang="el-GR" dirty="0"/>
+              <a:t>α → 0: </a:t>
+            </a:r>
+            <a:r>
+              <a:rPr lang="en-US" dirty="0"/>
+              <a:t>back to ordinary least squares (low bias, high variance)</a:t>
+            </a:r>
+          </a:p>
+          <a:p>
+            <a:pPr lvl="1"/>
+            <a:r>
+              <a:rPr lang="el-GR" dirty="0"/>
+              <a:t>α → ∞: </a:t>
+            </a:r>
+            <a:r>
+              <a:rPr lang="en-US" dirty="0"/>
+              <a:t>all coefficients shrink toward 0 (high bias, low variance)</a:t>
+            </a:r>
+          </a:p>
+          <a:p>
+            <a:pPr lvl="1"/>
+            <a:r>
+              <a:rPr lang="en-US" dirty="0"/>
+              <a:t>The regularization path plots coefficients against </a:t>
+            </a:r>
+            <a:r>
+              <a:rPr lang="el-GR" dirty="0"/>
+              <a:t>α — </a:t>
+            </a:r>
+            <a:r>
+              <a:rPr lang="en-US" dirty="0"/>
+              <a:t>useful for seeing which features survive</a:t>
+            </a:r>
+          </a:p>
+          <a:p>
+            <a:r>
+              <a:rPr lang="en-US" dirty="0"/>
+              <a:t>Choose </a:t>
+            </a:r>
+            <a:r>
+              <a:rPr lang="el-GR" dirty="0"/>
+              <a:t>α </a:t>
+            </a:r>
+            <a:r>
+              <a:rPr lang="en-US" dirty="0"/>
+              <a:t>by </a:t>
+            </a:r>
+            <a:r>
               <a:rPr lang="en-US"/>
-              <a:t>controls the bias–variance tradeoff</a:t>
-            </a:r>
-          </a:p>
-          <a:p>
-            <a:r>
-              <a:rPr lang="el-GR"/>
-              <a:t>α → 0: </a:t>
-            </a:r>
-            <a:r>
-              <a:rPr lang="en-US"/>
-              <a:t>back to ordinary least squares (low bias, high variance)</a:t>
-            </a:r>
-          </a:p>
-          <a:p>
-            <a:r>
-              <a:rPr lang="el-GR"/>
-              <a:t>α → ∞: </a:t>
-            </a:r>
-            <a:r>
-              <a:rPr lang="en-US"/>
-              <a:t>all coefficients shrink toward 0 (high bias, low variance)</a:t>
-            </a:r>
-          </a:p>
-          <a:p>
-            <a:r>
-              <a:rPr lang="en-US"/>
-              <a:t>Choose </a:t>
-            </a:r>
-            <a:r>
-              <a:rPr lang="el-GR"/>
+              <a:t>k-fold cv: </a:t>
+            </a:r>
+            <a:r>
+              <a:rPr lang="en-US" dirty="0"/>
+              <a:t>fit over a grid of </a:t>
+            </a:r>
+            <a:r>
+              <a:rPr lang="el-GR" dirty="0"/>
               <a:t>α </a:t>
             </a:r>
             <a:r>
-              <a:rPr lang="en-US"/>
-              <a:t>by k-fold cross-validation: fit over </a:t>
-            </a:r>
-            <a:r>
               <a:rPr lang="en-US" dirty="0"/>
-              <a:t>a </a:t>
-            </a:r>
-            <a:r>
-              <a:rPr lang="en-US"/>
-              <a:t>grid </a:t>
-            </a:r>
+              <a:t>values, pick the one minimizing CV error</a:t>
+            </a:r>
+          </a:p>
+          <a:p>
             <a:r>
               <a:rPr lang="en-US" dirty="0"/>
-              <a:t>of </a:t>
-            </a:r>
-            <a:r>
-              <a:rPr lang="el-GR"/>
-              <a:t>α </a:t>
-            </a:r>
-            <a:r>
-              <a:rPr lang="en-US"/>
-              <a:t>values</a:t>
-            </a:r>
+              <a:t>Always standardize predictors first: penalties are not scale-invariant, so units change the answer</a:t>
+            </a:r>
+          </a:p>
+          <a:p>
             <a:r>
               <a:rPr lang="en-US" dirty="0"/>
-              <a:t>, </a:t>
-            </a:r>
-            <a:r>
-              <a:rPr lang="en-US"/>
-              <a:t>pick the one minimizing CV error</a:t>
-            </a:r>
-            <a:endParaRPr lang="en-US" dirty="0"/>
-          </a:p>
-          <a:p>
-            <a:r>
-              <a:rPr lang="en-US"/>
-              <a:t>The regularization path plots coefficients against </a:t>
-            </a:r>
-            <a:r>
-              <a:rPr lang="el-GR"/>
-              <a:t>α — </a:t>
-            </a:r>
-            <a:r>
-              <a:rPr lang="en-US"/>
-              <a:t>useful for seeing which features survive</a:t>
-            </a:r>
-          </a:p>
-          <a:p>
-            <a:r>
-              <a:rPr lang="en-US"/>
-              <a:t>Always standardize predictors first</a:t>
-            </a:r>
-            <a:r>
-              <a:rPr lang="en-US" dirty="0"/>
-              <a:t>: </a:t>
-            </a:r>
-            <a:r>
-              <a:rPr lang="en-US"/>
-              <a:t>penalties are not scale-invariant</a:t>
-            </a:r>
-            <a:r>
-              <a:rPr lang="en-US" dirty="0"/>
-              <a:t>, </a:t>
-            </a:r>
-            <a:r>
-              <a:rPr lang="en-US"/>
-              <a:t>so units change </a:t>
-            </a:r>
-            <a:r>
-              <a:rPr lang="en-US" dirty="0"/>
-              <a:t>the </a:t>
-            </a:r>
-            <a:r>
-              <a:rPr lang="en-US"/>
-              <a:t>answer</a:t>
-            </a:r>
-          </a:p>
-          <a:p>
-            <a:r>
-              <a:rPr lang="en-US"/>
               <a:t>The intercept β₀ is not penalized</a:t>
             </a:r>
           </a:p>
@@ -8764,6 +8730,7 @@
             </a:r>
           </a:p>
           <a:p>
+            <a:pPr lvl="1"/>
             <a:r>
               <a:rPr lang="en-US" dirty="0" err="1"/>
               <a:t>make_pipeline</a:t>
@@ -8801,6 +8768,7 @@
             <a:endParaRPr lang="en-US" sz="1800" dirty="0"/>
           </a:p>
           <a:p>
+            <a:pPr lvl="1"/>
             <a:r>
               <a:rPr lang="en-US" dirty="0" err="1"/>
               <a:t>cv.glmnet</a:t>
@@ -8811,14 +8779,16 @@
             </a:r>
           </a:p>
           <a:p>
-            <a:r>
-              <a:rPr lang="en-US" sz="1800" dirty="0"/>
+            <a:pPr lvl="1"/>
+            <a:r>
+              <a:rPr lang="en-US" sz="1600" dirty="0"/>
               <a:t>alpha: 1 = Lasso, 0 = Ridge, between = Elastic Net</a:t>
             </a:r>
           </a:p>
           <a:p>
-            <a:r>
-              <a:rPr lang="en-US" sz="1800" dirty="0"/>
+            <a:pPr lvl="1"/>
+            <a:r>
+              <a:rPr lang="en-US" sz="1600" dirty="0"/>
               <a:t>Penalty-weight conventions differ between packages</a:t>
             </a:r>
             <a:endParaRPr dirty="0"/>
@@ -9128,42 +9098,42 @@
           <a:lstStyle/>
           <a:p>
             <a:r>
-              <a:rPr lang="en-US"/>
-              <a:t>Regularization is the dial that controls model complexity</a:t>
-            </a:r>
-          </a:p>
-          <a:p>
-            <a:r>
-              <a:rPr lang="en-US"/>
+              <a:rPr lang="en-US" dirty="0"/>
+              <a:t>Regularization controls model complexity</a:t>
+            </a:r>
+          </a:p>
+          <a:p>
+            <a:r>
+              <a:rPr lang="en-US" dirty="0"/>
               <a:t>Lasso: sparse coefficients, built-in variable selection</a:t>
             </a:r>
           </a:p>
           <a:p>
             <a:r>
-              <a:rPr lang="en-US"/>
+              <a:rPr lang="en-US" dirty="0"/>
               <a:t>Ridge: stable shrinkage, handles correlated features</a:t>
             </a:r>
           </a:p>
           <a:p>
             <a:r>
-              <a:rPr lang="en-US"/>
+              <a:rPr lang="en-US" dirty="0"/>
               <a:t>Elastic Net: the middle ground</a:t>
             </a:r>
           </a:p>
           <a:p>
             <a:r>
-              <a:rPr lang="en-US"/>
+              <a:rPr lang="en-US" dirty="0"/>
               <a:t>Standardize first, then tune </a:t>
             </a:r>
             <a:r>
-              <a:rPr lang="el-GR"/>
+              <a:rPr lang="el-GR" dirty="0"/>
               <a:t>α </a:t>
             </a:r>
             <a:r>
-              <a:rPr lang="en-US"/>
+              <a:rPr lang="en-US" dirty="0"/>
               <a:t>by cross-validation</a:t>
             </a:r>
-            <a:endParaRPr/>
+            <a:endParaRPr dirty="0"/>
           </a:p>
         </p:txBody>
       </p:sp>
